--- a/assets/pptx-tpl/brat-green-2.pptx
+++ b/assets/pptx-tpl/brat-green-2.pptx
@@ -8,7 +8,7 @@
     <p:notesMasterId r:id="rId5"/>
   </p:notesMasterIdLst>
   <p:sldIdLst>
-    <p:sldId id="256" r:id="rId6"/>
+    <p:sldId id="273" r:id="rId23"/>
     <p:sldId id="264" r:id="rId14"/>
     <p:sldId id="265" r:id="rId15"/>
     <p:sldId id="266" r:id="rId16"/>
@@ -17503,2142 +17503,6 @@
 </p:sldMaster>
 </file>
 
-<file path=ppt/slides/slide1.xml><?xml version="1.0" encoding="utf-8"?>
-<p:sld xmlns:a="http://schemas.openxmlformats.org/drawingml/2006/main" xmlns:r="http://schemas.openxmlformats.org/officeDocument/2006/relationships" xmlns:mc="http://schemas.openxmlformats.org/markup-compatibility/2006" xmlns:mv="urn:schemas-microsoft-com:mac:vml" xmlns:p="http://schemas.openxmlformats.org/presentationml/2006/main" xmlns:c="http://schemas.openxmlformats.org/drawingml/2006/chart" xmlns:dgm="http://schemas.openxmlformats.org/drawingml/2006/diagram" xmlns:o="urn:schemas-microsoft-com:office:office" xmlns:v="urn:schemas-microsoft-com:vml" xmlns:pvml="urn:schemas-microsoft-com:office:powerpoint" xmlns:com="http://schemas.openxmlformats.org/drawingml/2006/compatibility" xmlns:p14="http://schemas.microsoft.com/office/powerpoint/2010/main" xmlns:p15="http://schemas.microsoft.com/office/powerpoint/2012/main" xmlns:ahyp="http://schemas.microsoft.com/office/drawing/2018/hyperlinkcolor">
-  <p:cSld>
-    <p:bg>
-      <p:bgPr>
-        <a:solidFill>
-          <a:srgbClr val="8ACE03"/>
-        </a:solidFill>
-      </p:bgPr>
-    </p:bg>
-    <p:spTree>
-      <p:nvGrpSpPr>
-        <p:cNvPr id="261" name="Shape 261"/>
-        <p:cNvGrpSpPr/>
-        <p:nvPr/>
-      </p:nvGrpSpPr>
-      <p:grpSpPr>
-        <a:xfrm>
-          <a:off x="0" y="0"/>
-          <a:ext cx="0" cy="0"/>
-          <a:chOff x="0" y="0"/>
-          <a:chExt cx="0" cy="0"/>
-        </a:xfrm>
-      </p:grpSpPr>
-      <p:sp>
-        <p:nvSpPr>
-          <p:cNvPr id="262" name="Google Shape;262;p18"/>
-          <p:cNvSpPr txBox="1"/>
-          <p:nvPr/>
-        </p:nvSpPr>
-        <p:spPr>
-          <a:xfrm>
-            <a:off x="1028700" y="914400"/>
-            <a:ext cx="1837581" cy="538480"/>
-          </a:xfrm>
-          <a:prstGeom prst="rect">
-            <a:avLst/>
-          </a:prstGeom>
-          <a:noFill/>
-          <a:ln>
-            <a:noFill/>
-          </a:ln>
-        </p:spPr>
-        <p:txBody>
-          <a:bodyPr anchorCtr="0" anchor="t" bIns="0" lIns="0" spcFirstLastPara="1" rIns="0" wrap="square" tIns="0">
-            <a:spAutoFit/>
-          </a:bodyPr>
-          <a:lstStyle/>
-          <a:p>
-            <a:pPr indent="0" lvl="0" marL="0" marR="0" rtl="0" algn="l">
-              <a:lnSpc>
-                <a:spcPct val="140014"/>
-              </a:lnSpc>
-              <a:spcBef>
-                <a:spcPts val="0"/>
-              </a:spcBef>
-              <a:spcAft>
-                <a:spcPts val="0"/>
-              </a:spcAft>
-              <a:buNone/>
-            </a:pPr>
-            <a:r>
-              <a:rPr b="1" i="0" lang="mn-MN" sz="2799" u="none" cap="none" strike="noStrike">
-                <a:solidFill>
-                  <a:srgbClr val="000000"/>
-                </a:solidFill>
-                <a:latin typeface="Arial"/>
-                <a:ea typeface="Arial"/>
-                <a:cs typeface="Arial"/>
-                <a:sym typeface="Arial"/>
-              </a:rPr>
-              <a:t>Graphican</a:t>
-            </a:r>
-            <a:endParaRPr/>
-          </a:p>
-        </p:txBody>
-      </p:sp>
-      <p:sp>
-        <p:nvSpPr>
-          <p:cNvPr id="263" name="Google Shape;263;p18"/>
-          <p:cNvSpPr txBox="1"/>
-          <p:nvPr/>
-        </p:nvSpPr>
-        <p:spPr>
-          <a:xfrm>
-            <a:off x="12705109" y="914400"/>
-            <a:ext cx="4554191" cy="538480"/>
-          </a:xfrm>
-          <a:prstGeom prst="rect">
-            <a:avLst/>
-          </a:prstGeom>
-          <a:noFill/>
-          <a:ln>
-            <a:noFill/>
-          </a:ln>
-        </p:spPr>
-        <p:txBody>
-          <a:bodyPr anchorCtr="0" anchor="t" bIns="0" lIns="0" spcFirstLastPara="1" rIns="0" wrap="square" tIns="0">
-            <a:spAutoFit/>
-          </a:bodyPr>
-          <a:lstStyle/>
-          <a:p>
-            <a:pPr indent="0" lvl="0" marL="0" marR="0" rtl="0" algn="r">
-              <a:lnSpc>
-                <a:spcPct val="140014"/>
-              </a:lnSpc>
-              <a:spcBef>
-                <a:spcPts val="0"/>
-              </a:spcBef>
-              <a:spcAft>
-                <a:spcPts val="0"/>
-              </a:spcAft>
-              <a:buNone/>
-            </a:pPr>
-            <a:r>
-              <a:rPr b="1" i="0" lang="mn-MN" sz="2799" u="none" cap="none" strike="noStrike">
-                <a:solidFill>
-                  <a:srgbClr val="000000"/>
-                </a:solidFill>
-                <a:latin typeface="Arial"/>
-                <a:ea typeface="Arial"/>
-                <a:cs typeface="Arial"/>
-                <a:sym typeface="Arial"/>
-              </a:rPr>
-              <a:t>Бүтээлч слайдууд</a:t>
-            </a:r>
-            <a:endParaRPr/>
-          </a:p>
-        </p:txBody>
-      </p:sp>
-      <p:sp>
-        <p:nvSpPr>
-          <p:cNvPr id="264" name="Google Shape;264;p18"/>
-          <p:cNvSpPr txBox="1"/>
-          <p:nvPr/>
-        </p:nvSpPr>
-        <p:spPr>
-          <a:xfrm>
-            <a:off x="1028700" y="1338580"/>
-            <a:ext cx="1837581" cy="538480"/>
-          </a:xfrm>
-          <a:prstGeom prst="rect">
-            <a:avLst/>
-          </a:prstGeom>
-          <a:noFill/>
-          <a:ln>
-            <a:noFill/>
-          </a:ln>
-        </p:spPr>
-        <p:txBody>
-          <a:bodyPr anchorCtr="0" anchor="t" bIns="0" lIns="0" spcFirstLastPara="1" rIns="0" wrap="square" tIns="0">
-            <a:spAutoFit/>
-          </a:bodyPr>
-          <a:lstStyle/>
-          <a:p>
-            <a:pPr indent="0" lvl="0" marL="0" marR="0" rtl="0" algn="l">
-              <a:lnSpc>
-                <a:spcPct val="140014"/>
-              </a:lnSpc>
-              <a:spcBef>
-                <a:spcPts val="0"/>
-              </a:spcBef>
-              <a:spcAft>
-                <a:spcPts val="0"/>
-              </a:spcAft>
-              <a:buNone/>
-            </a:pPr>
-            <a:r>
-              <a:rPr b="1" i="0" lang="mn-MN" sz="2799" u="none" cap="none" strike="noStrike">
-                <a:solidFill>
-                  <a:srgbClr val="5C8A00"/>
-                </a:solidFill>
-                <a:latin typeface="Arial"/>
-                <a:ea typeface="Arial"/>
-                <a:cs typeface="Arial"/>
-                <a:sym typeface="Arial"/>
-              </a:rPr>
-              <a:t>Graphican</a:t>
-            </a:r>
-            <a:endParaRPr/>
-          </a:p>
-        </p:txBody>
-      </p:sp>
-      <p:sp>
-        <p:nvSpPr>
-          <p:cNvPr id="265" name="Google Shape;265;p18"/>
-          <p:cNvSpPr txBox="1"/>
-          <p:nvPr/>
-        </p:nvSpPr>
-        <p:spPr>
-          <a:xfrm>
-            <a:off x="1028700" y="1762760"/>
-            <a:ext cx="1837581" cy="538480"/>
-          </a:xfrm>
-          <a:prstGeom prst="rect">
-            <a:avLst/>
-          </a:prstGeom>
-          <a:noFill/>
-          <a:ln>
-            <a:noFill/>
-          </a:ln>
-        </p:spPr>
-        <p:txBody>
-          <a:bodyPr anchorCtr="0" anchor="t" bIns="0" lIns="0" spcFirstLastPara="1" rIns="0" wrap="square" tIns="0">
-            <a:spAutoFit/>
-          </a:bodyPr>
-          <a:lstStyle/>
-          <a:p>
-            <a:pPr indent="0" lvl="0" marL="0" marR="0" rtl="0" algn="l">
-              <a:lnSpc>
-                <a:spcPct val="140014"/>
-              </a:lnSpc>
-              <a:spcBef>
-                <a:spcPts val="0"/>
-              </a:spcBef>
-              <a:spcAft>
-                <a:spcPts val="0"/>
-              </a:spcAft>
-              <a:buNone/>
-            </a:pPr>
-            <a:r>
-              <a:rPr b="1" i="0" lang="mn-MN" sz="2799" u="none" cap="none" strike="noStrike">
-                <a:solidFill>
-                  <a:srgbClr val="5C8A00"/>
-                </a:solidFill>
-                <a:latin typeface="Arial"/>
-                <a:ea typeface="Arial"/>
-                <a:cs typeface="Arial"/>
-                <a:sym typeface="Arial"/>
-              </a:rPr>
-              <a:t>Graphican</a:t>
-            </a:r>
-            <a:endParaRPr/>
-          </a:p>
-        </p:txBody>
-      </p:sp>
-      <p:sp>
-        <p:nvSpPr>
-          <p:cNvPr id="266" name="Google Shape;266;p18"/>
-          <p:cNvSpPr txBox="1"/>
-          <p:nvPr/>
-        </p:nvSpPr>
-        <p:spPr>
-          <a:xfrm>
-            <a:off x="1028700" y="2186940"/>
-            <a:ext cx="1837581" cy="538480"/>
-          </a:xfrm>
-          <a:prstGeom prst="rect">
-            <a:avLst/>
-          </a:prstGeom>
-          <a:noFill/>
-          <a:ln>
-            <a:noFill/>
-          </a:ln>
-        </p:spPr>
-        <p:txBody>
-          <a:bodyPr anchorCtr="0" anchor="t" bIns="0" lIns="0" spcFirstLastPara="1" rIns="0" wrap="square" tIns="0">
-            <a:spAutoFit/>
-          </a:bodyPr>
-          <a:lstStyle/>
-          <a:p>
-            <a:pPr indent="0" lvl="0" marL="0" marR="0" rtl="0" algn="l">
-              <a:lnSpc>
-                <a:spcPct val="140014"/>
-              </a:lnSpc>
-              <a:spcBef>
-                <a:spcPts val="0"/>
-              </a:spcBef>
-              <a:spcAft>
-                <a:spcPts val="0"/>
-              </a:spcAft>
-              <a:buNone/>
-            </a:pPr>
-            <a:r>
-              <a:rPr b="1" i="0" lang="mn-MN" sz="2799" u="none" cap="none" strike="noStrike">
-                <a:solidFill>
-                  <a:srgbClr val="5C8A00"/>
-                </a:solidFill>
-                <a:latin typeface="Arial"/>
-                <a:ea typeface="Arial"/>
-                <a:cs typeface="Arial"/>
-                <a:sym typeface="Arial"/>
-              </a:rPr>
-              <a:t>Graphican</a:t>
-            </a:r>
-            <a:endParaRPr/>
-          </a:p>
-        </p:txBody>
-      </p:sp>
-      <p:sp>
-        <p:nvSpPr>
-          <p:cNvPr id="267" name="Google Shape;267;p18"/>
-          <p:cNvSpPr txBox="1"/>
-          <p:nvPr/>
-        </p:nvSpPr>
-        <p:spPr>
-          <a:xfrm>
-            <a:off x="1028700" y="2611120"/>
-            <a:ext cx="1837581" cy="538480"/>
-          </a:xfrm>
-          <a:prstGeom prst="rect">
-            <a:avLst/>
-          </a:prstGeom>
-          <a:noFill/>
-          <a:ln>
-            <a:noFill/>
-          </a:ln>
-        </p:spPr>
-        <p:txBody>
-          <a:bodyPr anchorCtr="0" anchor="t" bIns="0" lIns="0" spcFirstLastPara="1" rIns="0" wrap="square" tIns="0">
-            <a:spAutoFit/>
-          </a:bodyPr>
-          <a:lstStyle/>
-          <a:p>
-            <a:pPr indent="0" lvl="0" marL="0" marR="0" rtl="0" algn="l">
-              <a:lnSpc>
-                <a:spcPct val="140014"/>
-              </a:lnSpc>
-              <a:spcBef>
-                <a:spcPts val="0"/>
-              </a:spcBef>
-              <a:spcAft>
-                <a:spcPts val="0"/>
-              </a:spcAft>
-              <a:buNone/>
-            </a:pPr>
-            <a:r>
-              <a:rPr b="1" i="0" lang="mn-MN" sz="2799" u="none" cap="none" strike="noStrike">
-                <a:solidFill>
-                  <a:srgbClr val="5C8A00"/>
-                </a:solidFill>
-                <a:latin typeface="Arial"/>
-                <a:ea typeface="Arial"/>
-                <a:cs typeface="Arial"/>
-                <a:sym typeface="Arial"/>
-              </a:rPr>
-              <a:t>Graphican</a:t>
-            </a:r>
-            <a:endParaRPr/>
-          </a:p>
-        </p:txBody>
-      </p:sp>
-      <p:sp>
-        <p:nvSpPr>
-          <p:cNvPr id="268" name="Google Shape;268;p18"/>
-          <p:cNvSpPr txBox="1"/>
-          <p:nvPr/>
-        </p:nvSpPr>
-        <p:spPr>
-          <a:xfrm>
-            <a:off x="1028700" y="3035300"/>
-            <a:ext cx="1837581" cy="538480"/>
-          </a:xfrm>
-          <a:prstGeom prst="rect">
-            <a:avLst/>
-          </a:prstGeom>
-          <a:noFill/>
-          <a:ln>
-            <a:noFill/>
-          </a:ln>
-        </p:spPr>
-        <p:txBody>
-          <a:bodyPr anchorCtr="0" anchor="t" bIns="0" lIns="0" spcFirstLastPara="1" rIns="0" wrap="square" tIns="0">
-            <a:spAutoFit/>
-          </a:bodyPr>
-          <a:lstStyle/>
-          <a:p>
-            <a:pPr indent="0" lvl="0" marL="0" marR="0" rtl="0" algn="l">
-              <a:lnSpc>
-                <a:spcPct val="140014"/>
-              </a:lnSpc>
-              <a:spcBef>
-                <a:spcPts val="0"/>
-              </a:spcBef>
-              <a:spcAft>
-                <a:spcPts val="0"/>
-              </a:spcAft>
-              <a:buNone/>
-            </a:pPr>
-            <a:r>
-              <a:rPr b="1" i="0" lang="mn-MN" sz="2799" u="none" cap="none" strike="noStrike">
-                <a:solidFill>
-                  <a:srgbClr val="5C8A00"/>
-                </a:solidFill>
-                <a:latin typeface="Arial"/>
-                <a:ea typeface="Arial"/>
-                <a:cs typeface="Arial"/>
-                <a:sym typeface="Arial"/>
-              </a:rPr>
-              <a:t>Graphican</a:t>
-            </a:r>
-            <a:endParaRPr/>
-          </a:p>
-        </p:txBody>
-      </p:sp>
-      <p:sp>
-        <p:nvSpPr>
-          <p:cNvPr id="269" name="Google Shape;269;p18"/>
-          <p:cNvSpPr txBox="1"/>
-          <p:nvPr/>
-        </p:nvSpPr>
-        <p:spPr>
-          <a:xfrm>
-            <a:off x="1028700" y="3459480"/>
-            <a:ext cx="1837581" cy="538480"/>
-          </a:xfrm>
-          <a:prstGeom prst="rect">
-            <a:avLst/>
-          </a:prstGeom>
-          <a:noFill/>
-          <a:ln>
-            <a:noFill/>
-          </a:ln>
-        </p:spPr>
-        <p:txBody>
-          <a:bodyPr anchorCtr="0" anchor="t" bIns="0" lIns="0" spcFirstLastPara="1" rIns="0" wrap="square" tIns="0">
-            <a:spAutoFit/>
-          </a:bodyPr>
-          <a:lstStyle/>
-          <a:p>
-            <a:pPr indent="0" lvl="0" marL="0" marR="0" rtl="0" algn="l">
-              <a:lnSpc>
-                <a:spcPct val="140014"/>
-              </a:lnSpc>
-              <a:spcBef>
-                <a:spcPts val="0"/>
-              </a:spcBef>
-              <a:spcAft>
-                <a:spcPts val="0"/>
-              </a:spcAft>
-              <a:buNone/>
-            </a:pPr>
-            <a:r>
-              <a:rPr b="1" i="0" lang="mn-MN" sz="2799" u="none" cap="none" strike="noStrike">
-                <a:solidFill>
-                  <a:srgbClr val="5C8A00"/>
-                </a:solidFill>
-                <a:latin typeface="Arial"/>
-                <a:ea typeface="Arial"/>
-                <a:cs typeface="Arial"/>
-                <a:sym typeface="Arial"/>
-              </a:rPr>
-              <a:t>Graphican</a:t>
-            </a:r>
-            <a:endParaRPr/>
-          </a:p>
-        </p:txBody>
-      </p:sp>
-      <p:sp>
-        <p:nvSpPr>
-          <p:cNvPr id="270" name="Google Shape;270;p18"/>
-          <p:cNvSpPr txBox="1"/>
-          <p:nvPr/>
-        </p:nvSpPr>
-        <p:spPr>
-          <a:xfrm>
-            <a:off x="1028700" y="3883660"/>
-            <a:ext cx="1837581" cy="538480"/>
-          </a:xfrm>
-          <a:prstGeom prst="rect">
-            <a:avLst/>
-          </a:prstGeom>
-          <a:noFill/>
-          <a:ln>
-            <a:noFill/>
-          </a:ln>
-        </p:spPr>
-        <p:txBody>
-          <a:bodyPr anchorCtr="0" anchor="t" bIns="0" lIns="0" spcFirstLastPara="1" rIns="0" wrap="square" tIns="0">
-            <a:spAutoFit/>
-          </a:bodyPr>
-          <a:lstStyle/>
-          <a:p>
-            <a:pPr indent="0" lvl="0" marL="0" marR="0" rtl="0" algn="l">
-              <a:lnSpc>
-                <a:spcPct val="140014"/>
-              </a:lnSpc>
-              <a:spcBef>
-                <a:spcPts val="0"/>
-              </a:spcBef>
-              <a:spcAft>
-                <a:spcPts val="0"/>
-              </a:spcAft>
-              <a:buNone/>
-            </a:pPr>
-            <a:r>
-              <a:rPr b="1" i="0" lang="mn-MN" sz="2799" u="none" cap="none" strike="noStrike">
-                <a:solidFill>
-                  <a:srgbClr val="5C8A00"/>
-                </a:solidFill>
-                <a:latin typeface="Arial"/>
-                <a:ea typeface="Arial"/>
-                <a:cs typeface="Arial"/>
-                <a:sym typeface="Arial"/>
-              </a:rPr>
-              <a:t>Graphican</a:t>
-            </a:r>
-            <a:endParaRPr/>
-          </a:p>
-        </p:txBody>
-      </p:sp>
-      <p:sp>
-        <p:nvSpPr>
-          <p:cNvPr id="271" name="Google Shape;271;p18"/>
-          <p:cNvSpPr txBox="1"/>
-          <p:nvPr/>
-        </p:nvSpPr>
-        <p:spPr>
-          <a:xfrm>
-            <a:off x="1028700" y="4307841"/>
-            <a:ext cx="1837581" cy="538480"/>
-          </a:xfrm>
-          <a:prstGeom prst="rect">
-            <a:avLst/>
-          </a:prstGeom>
-          <a:noFill/>
-          <a:ln>
-            <a:noFill/>
-          </a:ln>
-        </p:spPr>
-        <p:txBody>
-          <a:bodyPr anchorCtr="0" anchor="t" bIns="0" lIns="0" spcFirstLastPara="1" rIns="0" wrap="square" tIns="0">
-            <a:spAutoFit/>
-          </a:bodyPr>
-          <a:lstStyle/>
-          <a:p>
-            <a:pPr indent="0" lvl="0" marL="0" marR="0" rtl="0" algn="l">
-              <a:lnSpc>
-                <a:spcPct val="140014"/>
-              </a:lnSpc>
-              <a:spcBef>
-                <a:spcPts val="0"/>
-              </a:spcBef>
-              <a:spcAft>
-                <a:spcPts val="0"/>
-              </a:spcAft>
-              <a:buNone/>
-            </a:pPr>
-            <a:r>
-              <a:rPr b="1" i="0" lang="mn-MN" sz="2799" u="none" cap="none" strike="noStrike">
-                <a:solidFill>
-                  <a:srgbClr val="5C8A00"/>
-                </a:solidFill>
-                <a:latin typeface="Arial"/>
-                <a:ea typeface="Arial"/>
-                <a:cs typeface="Arial"/>
-                <a:sym typeface="Arial"/>
-              </a:rPr>
-              <a:t>Graphican</a:t>
-            </a:r>
-            <a:endParaRPr/>
-          </a:p>
-        </p:txBody>
-      </p:sp>
-      <p:sp>
-        <p:nvSpPr>
-          <p:cNvPr id="272" name="Google Shape;272;p18"/>
-          <p:cNvSpPr txBox="1"/>
-          <p:nvPr/>
-        </p:nvSpPr>
-        <p:spPr>
-          <a:xfrm>
-            <a:off x="1028700" y="4732021"/>
-            <a:ext cx="1837581" cy="538480"/>
-          </a:xfrm>
-          <a:prstGeom prst="rect">
-            <a:avLst/>
-          </a:prstGeom>
-          <a:noFill/>
-          <a:ln>
-            <a:noFill/>
-          </a:ln>
-        </p:spPr>
-        <p:txBody>
-          <a:bodyPr anchorCtr="0" anchor="t" bIns="0" lIns="0" spcFirstLastPara="1" rIns="0" wrap="square" tIns="0">
-            <a:spAutoFit/>
-          </a:bodyPr>
-          <a:lstStyle/>
-          <a:p>
-            <a:pPr indent="0" lvl="0" marL="0" marR="0" rtl="0" algn="l">
-              <a:lnSpc>
-                <a:spcPct val="140014"/>
-              </a:lnSpc>
-              <a:spcBef>
-                <a:spcPts val="0"/>
-              </a:spcBef>
-              <a:spcAft>
-                <a:spcPts val="0"/>
-              </a:spcAft>
-              <a:buNone/>
-            </a:pPr>
-            <a:r>
-              <a:rPr b="1" i="0" lang="mn-MN" sz="2799" u="none" cap="none" strike="noStrike">
-                <a:solidFill>
-                  <a:srgbClr val="5C8A00"/>
-                </a:solidFill>
-                <a:latin typeface="Arial"/>
-                <a:ea typeface="Arial"/>
-                <a:cs typeface="Arial"/>
-                <a:sym typeface="Arial"/>
-              </a:rPr>
-              <a:t>Graphican</a:t>
-            </a:r>
-            <a:endParaRPr/>
-          </a:p>
-        </p:txBody>
-      </p:sp>
-      <p:sp>
-        <p:nvSpPr>
-          <p:cNvPr id="273" name="Google Shape;273;p18"/>
-          <p:cNvSpPr txBox="1"/>
-          <p:nvPr/>
-        </p:nvSpPr>
-        <p:spPr>
-          <a:xfrm>
-            <a:off x="12705109" y="1365986"/>
-            <a:ext cx="4554191" cy="538480"/>
-          </a:xfrm>
-          <a:prstGeom prst="rect">
-            <a:avLst/>
-          </a:prstGeom>
-          <a:noFill/>
-          <a:ln>
-            <a:noFill/>
-          </a:ln>
-        </p:spPr>
-        <p:txBody>
-          <a:bodyPr anchorCtr="0" anchor="t" bIns="0" lIns="0" spcFirstLastPara="1" rIns="0" wrap="square" tIns="0">
-            <a:spAutoFit/>
-          </a:bodyPr>
-          <a:lstStyle/>
-          <a:p>
-            <a:pPr indent="0" lvl="0" marL="0" marR="0" rtl="0" algn="r">
-              <a:lnSpc>
-                <a:spcPct val="140014"/>
-              </a:lnSpc>
-              <a:spcBef>
-                <a:spcPts val="0"/>
-              </a:spcBef>
-              <a:spcAft>
-                <a:spcPts val="0"/>
-              </a:spcAft>
-              <a:buNone/>
-            </a:pPr>
-            <a:r>
-              <a:rPr b="1" i="0" lang="mn-MN" sz="2799" u="none" cap="none" strike="noStrike">
-                <a:solidFill>
-                  <a:srgbClr val="5C8A00"/>
-                </a:solidFill>
-                <a:latin typeface="Arial"/>
-                <a:ea typeface="Arial"/>
-                <a:cs typeface="Arial"/>
-                <a:sym typeface="Arial"/>
-              </a:rPr>
-              <a:t>Бүтээлч слайдууд</a:t>
-            </a:r>
-            <a:endParaRPr/>
-          </a:p>
-        </p:txBody>
-      </p:sp>
-      <p:sp>
-        <p:nvSpPr>
-          <p:cNvPr id="274" name="Google Shape;274;p18"/>
-          <p:cNvSpPr txBox="1"/>
-          <p:nvPr/>
-        </p:nvSpPr>
-        <p:spPr>
-          <a:xfrm>
-            <a:off x="12705109" y="1817572"/>
-            <a:ext cx="4554191" cy="538480"/>
-          </a:xfrm>
-          <a:prstGeom prst="rect">
-            <a:avLst/>
-          </a:prstGeom>
-          <a:noFill/>
-          <a:ln>
-            <a:noFill/>
-          </a:ln>
-        </p:spPr>
-        <p:txBody>
-          <a:bodyPr anchorCtr="0" anchor="t" bIns="0" lIns="0" spcFirstLastPara="1" rIns="0" wrap="square" tIns="0">
-            <a:spAutoFit/>
-          </a:bodyPr>
-          <a:lstStyle/>
-          <a:p>
-            <a:pPr indent="0" lvl="0" marL="0" marR="0" rtl="0" algn="r">
-              <a:lnSpc>
-                <a:spcPct val="140014"/>
-              </a:lnSpc>
-              <a:spcBef>
-                <a:spcPts val="0"/>
-              </a:spcBef>
-              <a:spcAft>
-                <a:spcPts val="0"/>
-              </a:spcAft>
-              <a:buNone/>
-            </a:pPr>
-            <a:r>
-              <a:rPr b="1" i="0" lang="mn-MN" sz="2799" u="none" cap="none" strike="noStrike">
-                <a:solidFill>
-                  <a:srgbClr val="5C8A00"/>
-                </a:solidFill>
-                <a:latin typeface="Arial"/>
-                <a:ea typeface="Arial"/>
-                <a:cs typeface="Arial"/>
-                <a:sym typeface="Arial"/>
-              </a:rPr>
-              <a:t>Бүтээлч слайдууд</a:t>
-            </a:r>
-            <a:endParaRPr/>
-          </a:p>
-        </p:txBody>
-      </p:sp>
-      <p:sp>
-        <p:nvSpPr>
-          <p:cNvPr id="275" name="Google Shape;275;p18"/>
-          <p:cNvSpPr txBox="1"/>
-          <p:nvPr/>
-        </p:nvSpPr>
-        <p:spPr>
-          <a:xfrm>
-            <a:off x="12705109" y="2269158"/>
-            <a:ext cx="4554191" cy="538480"/>
-          </a:xfrm>
-          <a:prstGeom prst="rect">
-            <a:avLst/>
-          </a:prstGeom>
-          <a:noFill/>
-          <a:ln>
-            <a:noFill/>
-          </a:ln>
-        </p:spPr>
-        <p:txBody>
-          <a:bodyPr anchorCtr="0" anchor="t" bIns="0" lIns="0" spcFirstLastPara="1" rIns="0" wrap="square" tIns="0">
-            <a:spAutoFit/>
-          </a:bodyPr>
-          <a:lstStyle/>
-          <a:p>
-            <a:pPr indent="0" lvl="0" marL="0" marR="0" rtl="0" algn="r">
-              <a:lnSpc>
-                <a:spcPct val="140014"/>
-              </a:lnSpc>
-              <a:spcBef>
-                <a:spcPts val="0"/>
-              </a:spcBef>
-              <a:spcAft>
-                <a:spcPts val="0"/>
-              </a:spcAft>
-              <a:buNone/>
-            </a:pPr>
-            <a:r>
-              <a:rPr b="1" i="0" lang="mn-MN" sz="2799" u="none" cap="none" strike="noStrike">
-                <a:solidFill>
-                  <a:srgbClr val="5C8A00"/>
-                </a:solidFill>
-                <a:latin typeface="Arial"/>
-                <a:ea typeface="Arial"/>
-                <a:cs typeface="Arial"/>
-                <a:sym typeface="Arial"/>
-              </a:rPr>
-              <a:t>Бүтээлч слайдууд</a:t>
-            </a:r>
-            <a:endParaRPr/>
-          </a:p>
-        </p:txBody>
-      </p:sp>
-      <p:sp>
-        <p:nvSpPr>
-          <p:cNvPr id="276" name="Google Shape;276;p18"/>
-          <p:cNvSpPr txBox="1"/>
-          <p:nvPr/>
-        </p:nvSpPr>
-        <p:spPr>
-          <a:xfrm>
-            <a:off x="12705109" y="2720744"/>
-            <a:ext cx="4554191" cy="538480"/>
-          </a:xfrm>
-          <a:prstGeom prst="rect">
-            <a:avLst/>
-          </a:prstGeom>
-          <a:noFill/>
-          <a:ln>
-            <a:noFill/>
-          </a:ln>
-        </p:spPr>
-        <p:txBody>
-          <a:bodyPr anchorCtr="0" anchor="t" bIns="0" lIns="0" spcFirstLastPara="1" rIns="0" wrap="square" tIns="0">
-            <a:spAutoFit/>
-          </a:bodyPr>
-          <a:lstStyle/>
-          <a:p>
-            <a:pPr indent="0" lvl="0" marL="0" marR="0" rtl="0" algn="r">
-              <a:lnSpc>
-                <a:spcPct val="140014"/>
-              </a:lnSpc>
-              <a:spcBef>
-                <a:spcPts val="0"/>
-              </a:spcBef>
-              <a:spcAft>
-                <a:spcPts val="0"/>
-              </a:spcAft>
-              <a:buNone/>
-            </a:pPr>
-            <a:r>
-              <a:rPr b="1" i="0" lang="mn-MN" sz="2799" u="none" cap="none" strike="noStrike">
-                <a:solidFill>
-                  <a:srgbClr val="5C8A00"/>
-                </a:solidFill>
-                <a:latin typeface="Arial"/>
-                <a:ea typeface="Arial"/>
-                <a:cs typeface="Arial"/>
-                <a:sym typeface="Arial"/>
-              </a:rPr>
-              <a:t>Бүтээлч слайдууд</a:t>
-            </a:r>
-            <a:endParaRPr/>
-          </a:p>
-        </p:txBody>
-      </p:sp>
-      <p:sp>
-        <p:nvSpPr>
-          <p:cNvPr id="277" name="Google Shape;277;p18"/>
-          <p:cNvSpPr txBox="1"/>
-          <p:nvPr/>
-        </p:nvSpPr>
-        <p:spPr>
-          <a:xfrm>
-            <a:off x="12705109" y="3172330"/>
-            <a:ext cx="4554191" cy="538480"/>
-          </a:xfrm>
-          <a:prstGeom prst="rect">
-            <a:avLst/>
-          </a:prstGeom>
-          <a:noFill/>
-          <a:ln>
-            <a:noFill/>
-          </a:ln>
-        </p:spPr>
-        <p:txBody>
-          <a:bodyPr anchorCtr="0" anchor="t" bIns="0" lIns="0" spcFirstLastPara="1" rIns="0" wrap="square" tIns="0">
-            <a:spAutoFit/>
-          </a:bodyPr>
-          <a:lstStyle/>
-          <a:p>
-            <a:pPr indent="0" lvl="0" marL="0" marR="0" rtl="0" algn="r">
-              <a:lnSpc>
-                <a:spcPct val="140014"/>
-              </a:lnSpc>
-              <a:spcBef>
-                <a:spcPts val="0"/>
-              </a:spcBef>
-              <a:spcAft>
-                <a:spcPts val="0"/>
-              </a:spcAft>
-              <a:buNone/>
-            </a:pPr>
-            <a:r>
-              <a:rPr b="1" i="0" lang="mn-MN" sz="2799" u="none" cap="none" strike="noStrike">
-                <a:solidFill>
-                  <a:srgbClr val="5C8A00"/>
-                </a:solidFill>
-                <a:latin typeface="Arial"/>
-                <a:ea typeface="Arial"/>
-                <a:cs typeface="Arial"/>
-                <a:sym typeface="Arial"/>
-              </a:rPr>
-              <a:t>Бүтээлч слайдууд</a:t>
-            </a:r>
-            <a:endParaRPr/>
-          </a:p>
-        </p:txBody>
-      </p:sp>
-      <p:sp>
-        <p:nvSpPr>
-          <p:cNvPr id="278" name="Google Shape;278;p18"/>
-          <p:cNvSpPr txBox="1"/>
-          <p:nvPr/>
-        </p:nvSpPr>
-        <p:spPr>
-          <a:xfrm>
-            <a:off x="12705109" y="3623916"/>
-            <a:ext cx="4554191" cy="538480"/>
-          </a:xfrm>
-          <a:prstGeom prst="rect">
-            <a:avLst/>
-          </a:prstGeom>
-          <a:noFill/>
-          <a:ln>
-            <a:noFill/>
-          </a:ln>
-        </p:spPr>
-        <p:txBody>
-          <a:bodyPr anchorCtr="0" anchor="t" bIns="0" lIns="0" spcFirstLastPara="1" rIns="0" wrap="square" tIns="0">
-            <a:spAutoFit/>
-          </a:bodyPr>
-          <a:lstStyle/>
-          <a:p>
-            <a:pPr indent="0" lvl="0" marL="0" marR="0" rtl="0" algn="r">
-              <a:lnSpc>
-                <a:spcPct val="140014"/>
-              </a:lnSpc>
-              <a:spcBef>
-                <a:spcPts val="0"/>
-              </a:spcBef>
-              <a:spcAft>
-                <a:spcPts val="0"/>
-              </a:spcAft>
-              <a:buNone/>
-            </a:pPr>
-            <a:r>
-              <a:rPr b="1" i="0" lang="mn-MN" sz="2799" u="none" cap="none" strike="noStrike">
-                <a:solidFill>
-                  <a:srgbClr val="5C8A00"/>
-                </a:solidFill>
-                <a:latin typeface="Arial"/>
-                <a:ea typeface="Arial"/>
-                <a:cs typeface="Arial"/>
-                <a:sym typeface="Arial"/>
-              </a:rPr>
-              <a:t>Бүтээлч слайдууд</a:t>
-            </a:r>
-            <a:endParaRPr/>
-          </a:p>
-        </p:txBody>
-      </p:sp>
-      <p:sp>
-        <p:nvSpPr>
-          <p:cNvPr id="279" name="Google Shape;279;p18"/>
-          <p:cNvSpPr txBox="1"/>
-          <p:nvPr/>
-        </p:nvSpPr>
-        <p:spPr>
-          <a:xfrm>
-            <a:off x="12705109" y="4075502"/>
-            <a:ext cx="4554191" cy="538480"/>
-          </a:xfrm>
-          <a:prstGeom prst="rect">
-            <a:avLst/>
-          </a:prstGeom>
-          <a:noFill/>
-          <a:ln>
-            <a:noFill/>
-          </a:ln>
-        </p:spPr>
-        <p:txBody>
-          <a:bodyPr anchorCtr="0" anchor="t" bIns="0" lIns="0" spcFirstLastPara="1" rIns="0" wrap="square" tIns="0">
-            <a:spAutoFit/>
-          </a:bodyPr>
-          <a:lstStyle/>
-          <a:p>
-            <a:pPr indent="0" lvl="0" marL="0" marR="0" rtl="0" algn="r">
-              <a:lnSpc>
-                <a:spcPct val="140014"/>
-              </a:lnSpc>
-              <a:spcBef>
-                <a:spcPts val="0"/>
-              </a:spcBef>
-              <a:spcAft>
-                <a:spcPts val="0"/>
-              </a:spcAft>
-              <a:buNone/>
-            </a:pPr>
-            <a:r>
-              <a:rPr b="1" i="0" lang="mn-MN" sz="2799" u="none" cap="none" strike="noStrike">
-                <a:solidFill>
-                  <a:srgbClr val="5C8A00"/>
-                </a:solidFill>
-                <a:latin typeface="Arial"/>
-                <a:ea typeface="Arial"/>
-                <a:cs typeface="Arial"/>
-                <a:sym typeface="Arial"/>
-              </a:rPr>
-              <a:t>Бүтээлч слайдууд</a:t>
-            </a:r>
-            <a:endParaRPr/>
-          </a:p>
-        </p:txBody>
-      </p:sp>
-      <p:sp>
-        <p:nvSpPr>
-          <p:cNvPr id="280" name="Google Shape;280;p18"/>
-          <p:cNvSpPr txBox="1"/>
-          <p:nvPr/>
-        </p:nvSpPr>
-        <p:spPr>
-          <a:xfrm>
-            <a:off x="12705109" y="4527089"/>
-            <a:ext cx="4554191" cy="538480"/>
-          </a:xfrm>
-          <a:prstGeom prst="rect">
-            <a:avLst/>
-          </a:prstGeom>
-          <a:noFill/>
-          <a:ln>
-            <a:noFill/>
-          </a:ln>
-        </p:spPr>
-        <p:txBody>
-          <a:bodyPr anchorCtr="0" anchor="t" bIns="0" lIns="0" spcFirstLastPara="1" rIns="0" wrap="square" tIns="0">
-            <a:spAutoFit/>
-          </a:bodyPr>
-          <a:lstStyle/>
-          <a:p>
-            <a:pPr indent="0" lvl="0" marL="0" marR="0" rtl="0" algn="r">
-              <a:lnSpc>
-                <a:spcPct val="140014"/>
-              </a:lnSpc>
-              <a:spcBef>
-                <a:spcPts val="0"/>
-              </a:spcBef>
-              <a:spcAft>
-                <a:spcPts val="0"/>
-              </a:spcAft>
-              <a:buNone/>
-            </a:pPr>
-            <a:r>
-              <a:rPr b="1" i="0" lang="mn-MN" sz="2799" u="none" cap="none" strike="noStrike">
-                <a:solidFill>
-                  <a:srgbClr val="5C8A00"/>
-                </a:solidFill>
-                <a:latin typeface="Arial"/>
-                <a:ea typeface="Arial"/>
-                <a:cs typeface="Arial"/>
-                <a:sym typeface="Arial"/>
-              </a:rPr>
-              <a:t>Бүтээлч слайдууд</a:t>
-            </a:r>
-            <a:endParaRPr/>
-          </a:p>
-        </p:txBody>
-      </p:sp>
-      <p:sp>
-        <p:nvSpPr>
-          <p:cNvPr id="281" name="Google Shape;281;p18"/>
-          <p:cNvSpPr txBox="1"/>
-          <p:nvPr/>
-        </p:nvSpPr>
-        <p:spPr>
-          <a:xfrm>
-            <a:off x="12705109" y="4978675"/>
-            <a:ext cx="4554191" cy="538480"/>
-          </a:xfrm>
-          <a:prstGeom prst="rect">
-            <a:avLst/>
-          </a:prstGeom>
-          <a:noFill/>
-          <a:ln>
-            <a:noFill/>
-          </a:ln>
-        </p:spPr>
-        <p:txBody>
-          <a:bodyPr anchorCtr="0" anchor="t" bIns="0" lIns="0" spcFirstLastPara="1" rIns="0" wrap="square" tIns="0">
-            <a:spAutoFit/>
-          </a:bodyPr>
-          <a:lstStyle/>
-          <a:p>
-            <a:pPr indent="0" lvl="0" marL="0" marR="0" rtl="0" algn="r">
-              <a:lnSpc>
-                <a:spcPct val="140014"/>
-              </a:lnSpc>
-              <a:spcBef>
-                <a:spcPts val="0"/>
-              </a:spcBef>
-              <a:spcAft>
-                <a:spcPts val="0"/>
-              </a:spcAft>
-              <a:buNone/>
-            </a:pPr>
-            <a:r>
-              <a:rPr b="1" i="0" lang="mn-MN" sz="2799" u="none" cap="none" strike="noStrike">
-                <a:solidFill>
-                  <a:srgbClr val="5C8A00"/>
-                </a:solidFill>
-                <a:latin typeface="Arial"/>
-                <a:ea typeface="Arial"/>
-                <a:cs typeface="Arial"/>
-                <a:sym typeface="Arial"/>
-              </a:rPr>
-              <a:t>Бүтээлч слайдууд</a:t>
-            </a:r>
-            <a:endParaRPr/>
-          </a:p>
-        </p:txBody>
-      </p:sp>
-      <p:sp>
-        <p:nvSpPr>
-          <p:cNvPr id="282" name="Google Shape;282;p18"/>
-          <p:cNvSpPr txBox="1"/>
-          <p:nvPr/>
-        </p:nvSpPr>
-        <p:spPr>
-          <a:xfrm>
-            <a:off x="12705109" y="5430261"/>
-            <a:ext cx="4554191" cy="538480"/>
-          </a:xfrm>
-          <a:prstGeom prst="rect">
-            <a:avLst/>
-          </a:prstGeom>
-          <a:noFill/>
-          <a:ln>
-            <a:noFill/>
-          </a:ln>
-        </p:spPr>
-        <p:txBody>
-          <a:bodyPr anchorCtr="0" anchor="t" bIns="0" lIns="0" spcFirstLastPara="1" rIns="0" wrap="square" tIns="0">
-            <a:spAutoFit/>
-          </a:bodyPr>
-          <a:lstStyle/>
-          <a:p>
-            <a:pPr indent="0" lvl="0" marL="0" marR="0" rtl="0" algn="r">
-              <a:lnSpc>
-                <a:spcPct val="140014"/>
-              </a:lnSpc>
-              <a:spcBef>
-                <a:spcPts val="0"/>
-              </a:spcBef>
-              <a:spcAft>
-                <a:spcPts val="0"/>
-              </a:spcAft>
-              <a:buNone/>
-            </a:pPr>
-            <a:r>
-              <a:rPr b="1" i="0" lang="mn-MN" sz="2799" u="none" cap="none" strike="noStrike">
-                <a:solidFill>
-                  <a:srgbClr val="5C8A00"/>
-                </a:solidFill>
-                <a:latin typeface="Arial"/>
-                <a:ea typeface="Arial"/>
-                <a:cs typeface="Arial"/>
-                <a:sym typeface="Arial"/>
-              </a:rPr>
-              <a:t>Бүтээлч слайдууд</a:t>
-            </a:r>
-            <a:endParaRPr/>
-          </a:p>
-        </p:txBody>
-      </p:sp>
-      <p:sp>
-        <p:nvSpPr>
-          <p:cNvPr id="283" name="Google Shape;283;p18"/>
-          <p:cNvSpPr txBox="1"/>
-          <p:nvPr/>
-        </p:nvSpPr>
-        <p:spPr>
-          <a:xfrm>
-            <a:off x="12705109" y="5881847"/>
-            <a:ext cx="4554191" cy="538480"/>
-          </a:xfrm>
-          <a:prstGeom prst="rect">
-            <a:avLst/>
-          </a:prstGeom>
-          <a:noFill/>
-          <a:ln>
-            <a:noFill/>
-          </a:ln>
-        </p:spPr>
-        <p:txBody>
-          <a:bodyPr anchorCtr="0" anchor="t" bIns="0" lIns="0" spcFirstLastPara="1" rIns="0" wrap="square" tIns="0">
-            <a:spAutoFit/>
-          </a:bodyPr>
-          <a:lstStyle/>
-          <a:p>
-            <a:pPr indent="0" lvl="0" marL="0" marR="0" rtl="0" algn="r">
-              <a:lnSpc>
-                <a:spcPct val="140014"/>
-              </a:lnSpc>
-              <a:spcBef>
-                <a:spcPts val="0"/>
-              </a:spcBef>
-              <a:spcAft>
-                <a:spcPts val="0"/>
-              </a:spcAft>
-              <a:buNone/>
-            </a:pPr>
-            <a:r>
-              <a:rPr b="1" i="0" lang="mn-MN" sz="2799" u="none" cap="none" strike="noStrike">
-                <a:solidFill>
-                  <a:srgbClr val="5C8A00"/>
-                </a:solidFill>
-                <a:latin typeface="Arial"/>
-                <a:ea typeface="Arial"/>
-                <a:cs typeface="Arial"/>
-                <a:sym typeface="Arial"/>
-              </a:rPr>
-              <a:t>Бүтээлч слайдууд</a:t>
-            </a:r>
-            <a:endParaRPr/>
-          </a:p>
-        </p:txBody>
-      </p:sp>
-      <p:sp>
-        <p:nvSpPr>
-          <p:cNvPr id="284" name="Google Shape;284;p18"/>
-          <p:cNvSpPr txBox="1"/>
-          <p:nvPr/>
-        </p:nvSpPr>
-        <p:spPr>
-          <a:xfrm>
-            <a:off x="12705109" y="6333433"/>
-            <a:ext cx="4554191" cy="538480"/>
-          </a:xfrm>
-          <a:prstGeom prst="rect">
-            <a:avLst/>
-          </a:prstGeom>
-          <a:noFill/>
-          <a:ln>
-            <a:noFill/>
-          </a:ln>
-        </p:spPr>
-        <p:txBody>
-          <a:bodyPr anchorCtr="0" anchor="t" bIns="0" lIns="0" spcFirstLastPara="1" rIns="0" wrap="square" tIns="0">
-            <a:spAutoFit/>
-          </a:bodyPr>
-          <a:lstStyle/>
-          <a:p>
-            <a:pPr indent="0" lvl="0" marL="0" marR="0" rtl="0" algn="r">
-              <a:lnSpc>
-                <a:spcPct val="140014"/>
-              </a:lnSpc>
-              <a:spcBef>
-                <a:spcPts val="0"/>
-              </a:spcBef>
-              <a:spcAft>
-                <a:spcPts val="0"/>
-              </a:spcAft>
-              <a:buNone/>
-            </a:pPr>
-            <a:r>
-              <a:rPr b="1" i="0" lang="mn-MN" sz="2799" u="none" cap="none" strike="noStrike">
-                <a:solidFill>
-                  <a:srgbClr val="5C8A00"/>
-                </a:solidFill>
-                <a:latin typeface="Arial"/>
-                <a:ea typeface="Arial"/>
-                <a:cs typeface="Arial"/>
-                <a:sym typeface="Arial"/>
-              </a:rPr>
-              <a:t>Бүтээлч слайдууд</a:t>
-            </a:r>
-            <a:endParaRPr/>
-          </a:p>
-        </p:txBody>
-      </p:sp>
-      <p:sp>
-        <p:nvSpPr>
-          <p:cNvPr id="285" name="Google Shape;285;p18"/>
-          <p:cNvSpPr txBox="1"/>
-          <p:nvPr/>
-        </p:nvSpPr>
-        <p:spPr>
-          <a:xfrm>
-            <a:off x="12705109" y="6785019"/>
-            <a:ext cx="4554191" cy="538480"/>
-          </a:xfrm>
-          <a:prstGeom prst="rect">
-            <a:avLst/>
-          </a:prstGeom>
-          <a:noFill/>
-          <a:ln>
-            <a:noFill/>
-          </a:ln>
-        </p:spPr>
-        <p:txBody>
-          <a:bodyPr anchorCtr="0" anchor="t" bIns="0" lIns="0" spcFirstLastPara="1" rIns="0" wrap="square" tIns="0">
-            <a:spAutoFit/>
-          </a:bodyPr>
-          <a:lstStyle/>
-          <a:p>
-            <a:pPr indent="0" lvl="0" marL="0" marR="0" rtl="0" algn="r">
-              <a:lnSpc>
-                <a:spcPct val="140014"/>
-              </a:lnSpc>
-              <a:spcBef>
-                <a:spcPts val="0"/>
-              </a:spcBef>
-              <a:spcAft>
-                <a:spcPts val="0"/>
-              </a:spcAft>
-              <a:buNone/>
-            </a:pPr>
-            <a:r>
-              <a:rPr b="1" i="0" lang="mn-MN" sz="2799" u="none" cap="none" strike="noStrike">
-                <a:solidFill>
-                  <a:srgbClr val="5C8A00"/>
-                </a:solidFill>
-                <a:latin typeface="Arial"/>
-                <a:ea typeface="Arial"/>
-                <a:cs typeface="Arial"/>
-                <a:sym typeface="Arial"/>
-              </a:rPr>
-              <a:t>Бүтээлч слайдууд</a:t>
-            </a:r>
-            <a:endParaRPr/>
-          </a:p>
-        </p:txBody>
-      </p:sp>
-      <p:sp>
-        <p:nvSpPr>
-          <p:cNvPr id="286" name="Google Shape;286;p18"/>
-          <p:cNvSpPr txBox="1"/>
-          <p:nvPr/>
-        </p:nvSpPr>
-        <p:spPr>
-          <a:xfrm>
-            <a:off x="12705109" y="7236605"/>
-            <a:ext cx="4554191" cy="538480"/>
-          </a:xfrm>
-          <a:prstGeom prst="rect">
-            <a:avLst/>
-          </a:prstGeom>
-          <a:noFill/>
-          <a:ln>
-            <a:noFill/>
-          </a:ln>
-        </p:spPr>
-        <p:txBody>
-          <a:bodyPr anchorCtr="0" anchor="t" bIns="0" lIns="0" spcFirstLastPara="1" rIns="0" wrap="square" tIns="0">
-            <a:spAutoFit/>
-          </a:bodyPr>
-          <a:lstStyle/>
-          <a:p>
-            <a:pPr indent="0" lvl="0" marL="0" marR="0" rtl="0" algn="r">
-              <a:lnSpc>
-                <a:spcPct val="140014"/>
-              </a:lnSpc>
-              <a:spcBef>
-                <a:spcPts val="0"/>
-              </a:spcBef>
-              <a:spcAft>
-                <a:spcPts val="0"/>
-              </a:spcAft>
-              <a:buNone/>
-            </a:pPr>
-            <a:r>
-              <a:rPr b="1" i="0" lang="mn-MN" sz="2799" u="none" cap="none" strike="noStrike">
-                <a:solidFill>
-                  <a:srgbClr val="5C8A00"/>
-                </a:solidFill>
-                <a:latin typeface="Arial"/>
-                <a:ea typeface="Arial"/>
-                <a:cs typeface="Arial"/>
-                <a:sym typeface="Arial"/>
-              </a:rPr>
-              <a:t>Бүтээлч слайдууд</a:t>
-            </a:r>
-            <a:endParaRPr/>
-          </a:p>
-        </p:txBody>
-      </p:sp>
-      <p:sp>
-        <p:nvSpPr>
-          <p:cNvPr id="287" name="Google Shape;287;p18"/>
-          <p:cNvSpPr txBox="1"/>
-          <p:nvPr/>
-        </p:nvSpPr>
-        <p:spPr>
-          <a:xfrm>
-            <a:off x="1028700" y="5190765"/>
-            <a:ext cx="1837581" cy="538480"/>
-          </a:xfrm>
-          <a:prstGeom prst="rect">
-            <a:avLst/>
-          </a:prstGeom>
-          <a:noFill/>
-          <a:ln>
-            <a:noFill/>
-          </a:ln>
-        </p:spPr>
-        <p:txBody>
-          <a:bodyPr anchorCtr="0" anchor="t" bIns="0" lIns="0" spcFirstLastPara="1" rIns="0" wrap="square" tIns="0">
-            <a:spAutoFit/>
-          </a:bodyPr>
-          <a:lstStyle/>
-          <a:p>
-            <a:pPr indent="0" lvl="0" marL="0" marR="0" rtl="0" algn="l">
-              <a:lnSpc>
-                <a:spcPct val="140014"/>
-              </a:lnSpc>
-              <a:spcBef>
-                <a:spcPts val="0"/>
-              </a:spcBef>
-              <a:spcAft>
-                <a:spcPts val="0"/>
-              </a:spcAft>
-              <a:buNone/>
-            </a:pPr>
-            <a:r>
-              <a:rPr b="1" i="0" lang="mn-MN" sz="2799" u="none" cap="none" strike="noStrike">
-                <a:solidFill>
-                  <a:srgbClr val="5C8A00"/>
-                </a:solidFill>
-                <a:latin typeface="Arial"/>
-                <a:ea typeface="Arial"/>
-                <a:cs typeface="Arial"/>
-                <a:sym typeface="Arial"/>
-              </a:rPr>
-              <a:t>Graphican</a:t>
-            </a:r>
-            <a:endParaRPr/>
-          </a:p>
-        </p:txBody>
-      </p:sp>
-      <p:sp>
-        <p:nvSpPr>
-          <p:cNvPr id="288" name="Google Shape;288;p18"/>
-          <p:cNvSpPr txBox="1"/>
-          <p:nvPr/>
-        </p:nvSpPr>
-        <p:spPr>
-          <a:xfrm>
-            <a:off x="1028700" y="5614945"/>
-            <a:ext cx="1837581" cy="538480"/>
-          </a:xfrm>
-          <a:prstGeom prst="rect">
-            <a:avLst/>
-          </a:prstGeom>
-          <a:noFill/>
-          <a:ln>
-            <a:noFill/>
-          </a:ln>
-        </p:spPr>
-        <p:txBody>
-          <a:bodyPr anchorCtr="0" anchor="t" bIns="0" lIns="0" spcFirstLastPara="1" rIns="0" wrap="square" tIns="0">
-            <a:spAutoFit/>
-          </a:bodyPr>
-          <a:lstStyle/>
-          <a:p>
-            <a:pPr indent="0" lvl="0" marL="0" marR="0" rtl="0" algn="l">
-              <a:lnSpc>
-                <a:spcPct val="140014"/>
-              </a:lnSpc>
-              <a:spcBef>
-                <a:spcPts val="0"/>
-              </a:spcBef>
-              <a:spcAft>
-                <a:spcPts val="0"/>
-              </a:spcAft>
-              <a:buNone/>
-            </a:pPr>
-            <a:r>
-              <a:rPr b="1" i="0" lang="mn-MN" sz="2799" u="none" cap="none" strike="noStrike">
-                <a:solidFill>
-                  <a:srgbClr val="5C8A00"/>
-                </a:solidFill>
-                <a:latin typeface="Arial"/>
-                <a:ea typeface="Arial"/>
-                <a:cs typeface="Arial"/>
-                <a:sym typeface="Arial"/>
-              </a:rPr>
-              <a:t>Graphican</a:t>
-            </a:r>
-            <a:endParaRPr/>
-          </a:p>
-        </p:txBody>
-      </p:sp>
-      <p:sp>
-        <p:nvSpPr>
-          <p:cNvPr id="289" name="Google Shape;289;p18"/>
-          <p:cNvSpPr txBox="1"/>
-          <p:nvPr/>
-        </p:nvSpPr>
-        <p:spPr>
-          <a:xfrm>
-            <a:off x="1028700" y="6039125"/>
-            <a:ext cx="1837581" cy="538480"/>
-          </a:xfrm>
-          <a:prstGeom prst="rect">
-            <a:avLst/>
-          </a:prstGeom>
-          <a:noFill/>
-          <a:ln>
-            <a:noFill/>
-          </a:ln>
-        </p:spPr>
-        <p:txBody>
-          <a:bodyPr anchorCtr="0" anchor="t" bIns="0" lIns="0" spcFirstLastPara="1" rIns="0" wrap="square" tIns="0">
-            <a:spAutoFit/>
-          </a:bodyPr>
-          <a:lstStyle/>
-          <a:p>
-            <a:pPr indent="0" lvl="0" marL="0" marR="0" rtl="0" algn="l">
-              <a:lnSpc>
-                <a:spcPct val="140014"/>
-              </a:lnSpc>
-              <a:spcBef>
-                <a:spcPts val="0"/>
-              </a:spcBef>
-              <a:spcAft>
-                <a:spcPts val="0"/>
-              </a:spcAft>
-              <a:buNone/>
-            </a:pPr>
-            <a:r>
-              <a:rPr b="1" i="0" lang="mn-MN" sz="2799" u="none" cap="none" strike="noStrike">
-                <a:solidFill>
-                  <a:srgbClr val="5C8A00"/>
-                </a:solidFill>
-                <a:latin typeface="Arial"/>
-                <a:ea typeface="Arial"/>
-                <a:cs typeface="Arial"/>
-                <a:sym typeface="Arial"/>
-              </a:rPr>
-              <a:t>Graphican</a:t>
-            </a:r>
-            <a:endParaRPr/>
-          </a:p>
-        </p:txBody>
-      </p:sp>
-      <p:sp>
-        <p:nvSpPr>
-          <p:cNvPr id="290" name="Google Shape;290;p18"/>
-          <p:cNvSpPr txBox="1"/>
-          <p:nvPr/>
-        </p:nvSpPr>
-        <p:spPr>
-          <a:xfrm>
-            <a:off x="1028700" y="6463305"/>
-            <a:ext cx="1837581" cy="538480"/>
-          </a:xfrm>
-          <a:prstGeom prst="rect">
-            <a:avLst/>
-          </a:prstGeom>
-          <a:noFill/>
-          <a:ln>
-            <a:noFill/>
-          </a:ln>
-        </p:spPr>
-        <p:txBody>
-          <a:bodyPr anchorCtr="0" anchor="t" bIns="0" lIns="0" spcFirstLastPara="1" rIns="0" wrap="square" tIns="0">
-            <a:spAutoFit/>
-          </a:bodyPr>
-          <a:lstStyle/>
-          <a:p>
-            <a:pPr indent="0" lvl="0" marL="0" marR="0" rtl="0" algn="l">
-              <a:lnSpc>
-                <a:spcPct val="140014"/>
-              </a:lnSpc>
-              <a:spcBef>
-                <a:spcPts val="0"/>
-              </a:spcBef>
-              <a:spcAft>
-                <a:spcPts val="0"/>
-              </a:spcAft>
-              <a:buNone/>
-            </a:pPr>
-            <a:r>
-              <a:rPr b="1" i="0" lang="mn-MN" sz="2799" u="none" cap="none" strike="noStrike">
-                <a:solidFill>
-                  <a:srgbClr val="5C8A00"/>
-                </a:solidFill>
-                <a:latin typeface="Arial"/>
-                <a:ea typeface="Arial"/>
-                <a:cs typeface="Arial"/>
-                <a:sym typeface="Arial"/>
-              </a:rPr>
-              <a:t>Graphican</a:t>
-            </a:r>
-            <a:endParaRPr/>
-          </a:p>
-        </p:txBody>
-      </p:sp>
-      <p:sp>
-        <p:nvSpPr>
-          <p:cNvPr id="291" name="Google Shape;291;p18"/>
-          <p:cNvSpPr txBox="1"/>
-          <p:nvPr/>
-        </p:nvSpPr>
-        <p:spPr>
-          <a:xfrm>
-            <a:off x="1028700" y="6887485"/>
-            <a:ext cx="1837581" cy="538480"/>
-          </a:xfrm>
-          <a:prstGeom prst="rect">
-            <a:avLst/>
-          </a:prstGeom>
-          <a:noFill/>
-          <a:ln>
-            <a:noFill/>
-          </a:ln>
-        </p:spPr>
-        <p:txBody>
-          <a:bodyPr anchorCtr="0" anchor="t" bIns="0" lIns="0" spcFirstLastPara="1" rIns="0" wrap="square" tIns="0">
-            <a:spAutoFit/>
-          </a:bodyPr>
-          <a:lstStyle/>
-          <a:p>
-            <a:pPr indent="0" lvl="0" marL="0" marR="0" rtl="0" algn="l">
-              <a:lnSpc>
-                <a:spcPct val="140014"/>
-              </a:lnSpc>
-              <a:spcBef>
-                <a:spcPts val="0"/>
-              </a:spcBef>
-              <a:spcAft>
-                <a:spcPts val="0"/>
-              </a:spcAft>
-              <a:buNone/>
-            </a:pPr>
-            <a:r>
-              <a:rPr b="1" i="0" lang="mn-MN" sz="2799" u="none" cap="none" strike="noStrike">
-                <a:solidFill>
-                  <a:srgbClr val="5C8A00"/>
-                </a:solidFill>
-                <a:latin typeface="Arial"/>
-                <a:ea typeface="Arial"/>
-                <a:cs typeface="Arial"/>
-                <a:sym typeface="Arial"/>
-              </a:rPr>
-              <a:t>Graphican</a:t>
-            </a:r>
-            <a:endParaRPr/>
-          </a:p>
-        </p:txBody>
-      </p:sp>
-      <p:sp>
-        <p:nvSpPr>
-          <p:cNvPr id="292" name="Google Shape;292;p18"/>
-          <p:cNvSpPr txBox="1"/>
-          <p:nvPr/>
-        </p:nvSpPr>
-        <p:spPr>
-          <a:xfrm>
-            <a:off x="1028700" y="7311665"/>
-            <a:ext cx="1837581" cy="538480"/>
-          </a:xfrm>
-          <a:prstGeom prst="rect">
-            <a:avLst/>
-          </a:prstGeom>
-          <a:noFill/>
-          <a:ln>
-            <a:noFill/>
-          </a:ln>
-        </p:spPr>
-        <p:txBody>
-          <a:bodyPr anchorCtr="0" anchor="t" bIns="0" lIns="0" spcFirstLastPara="1" rIns="0" wrap="square" tIns="0">
-            <a:spAutoFit/>
-          </a:bodyPr>
-          <a:lstStyle/>
-          <a:p>
-            <a:pPr indent="0" lvl="0" marL="0" marR="0" rtl="0" algn="l">
-              <a:lnSpc>
-                <a:spcPct val="140014"/>
-              </a:lnSpc>
-              <a:spcBef>
-                <a:spcPts val="0"/>
-              </a:spcBef>
-              <a:spcAft>
-                <a:spcPts val="0"/>
-              </a:spcAft>
-              <a:buNone/>
-            </a:pPr>
-            <a:r>
-              <a:rPr b="1" i="0" lang="mn-MN" sz="2799" u="none" cap="none" strike="noStrike">
-                <a:solidFill>
-                  <a:srgbClr val="5C8A00"/>
-                </a:solidFill>
-                <a:latin typeface="Arial"/>
-                <a:ea typeface="Arial"/>
-                <a:cs typeface="Arial"/>
-                <a:sym typeface="Arial"/>
-              </a:rPr>
-              <a:t>Graphican</a:t>
-            </a:r>
-            <a:endParaRPr/>
-          </a:p>
-        </p:txBody>
-      </p:sp>
-      <p:sp>
-        <p:nvSpPr>
-          <p:cNvPr id="293" name="Google Shape;293;p18"/>
-          <p:cNvSpPr txBox="1"/>
-          <p:nvPr/>
-        </p:nvSpPr>
-        <p:spPr>
-          <a:xfrm>
-            <a:off x="1028700" y="7735845"/>
-            <a:ext cx="1837581" cy="538480"/>
-          </a:xfrm>
-          <a:prstGeom prst="rect">
-            <a:avLst/>
-          </a:prstGeom>
-          <a:noFill/>
-          <a:ln>
-            <a:noFill/>
-          </a:ln>
-        </p:spPr>
-        <p:txBody>
-          <a:bodyPr anchorCtr="0" anchor="t" bIns="0" lIns="0" spcFirstLastPara="1" rIns="0" wrap="square" tIns="0">
-            <a:spAutoFit/>
-          </a:bodyPr>
-          <a:lstStyle/>
-          <a:p>
-            <a:pPr indent="0" lvl="0" marL="0" marR="0" rtl="0" algn="l">
-              <a:lnSpc>
-                <a:spcPct val="140014"/>
-              </a:lnSpc>
-              <a:spcBef>
-                <a:spcPts val="0"/>
-              </a:spcBef>
-              <a:spcAft>
-                <a:spcPts val="0"/>
-              </a:spcAft>
-              <a:buNone/>
-            </a:pPr>
-            <a:r>
-              <a:rPr b="1" i="0" lang="mn-MN" sz="2799" u="none" cap="none" strike="noStrike">
-                <a:solidFill>
-                  <a:srgbClr val="5C8A00"/>
-                </a:solidFill>
-                <a:latin typeface="Arial"/>
-                <a:ea typeface="Arial"/>
-                <a:cs typeface="Arial"/>
-                <a:sym typeface="Arial"/>
-              </a:rPr>
-              <a:t>Graphican</a:t>
-            </a:r>
-            <a:endParaRPr/>
-          </a:p>
-        </p:txBody>
-      </p:sp>
-      <p:sp>
-        <p:nvSpPr>
-          <p:cNvPr id="294" name="Google Shape;294;p18"/>
-          <p:cNvSpPr txBox="1"/>
-          <p:nvPr/>
-        </p:nvSpPr>
-        <p:spPr>
-          <a:xfrm>
-            <a:off x="1028700" y="8160025"/>
-            <a:ext cx="1837581" cy="538480"/>
-          </a:xfrm>
-          <a:prstGeom prst="rect">
-            <a:avLst/>
-          </a:prstGeom>
-          <a:noFill/>
-          <a:ln>
-            <a:noFill/>
-          </a:ln>
-        </p:spPr>
-        <p:txBody>
-          <a:bodyPr anchorCtr="0" anchor="t" bIns="0" lIns="0" spcFirstLastPara="1" rIns="0" wrap="square" tIns="0">
-            <a:spAutoFit/>
-          </a:bodyPr>
-          <a:lstStyle/>
-          <a:p>
-            <a:pPr indent="0" lvl="0" marL="0" marR="0" rtl="0" algn="l">
-              <a:lnSpc>
-                <a:spcPct val="140014"/>
-              </a:lnSpc>
-              <a:spcBef>
-                <a:spcPts val="0"/>
-              </a:spcBef>
-              <a:spcAft>
-                <a:spcPts val="0"/>
-              </a:spcAft>
-              <a:buNone/>
-            </a:pPr>
-            <a:r>
-              <a:rPr b="1" i="0" lang="mn-MN" sz="2799" u="none" cap="none" strike="noStrike">
-                <a:solidFill>
-                  <a:srgbClr val="5C8A00"/>
-                </a:solidFill>
-                <a:latin typeface="Arial"/>
-                <a:ea typeface="Arial"/>
-                <a:cs typeface="Arial"/>
-                <a:sym typeface="Arial"/>
-              </a:rPr>
-              <a:t>Graphican</a:t>
-            </a:r>
-            <a:endParaRPr/>
-          </a:p>
-        </p:txBody>
-      </p:sp>
-      <p:sp>
-        <p:nvSpPr>
-          <p:cNvPr id="295" name="Google Shape;295;p18"/>
-          <p:cNvSpPr txBox="1"/>
-          <p:nvPr/>
-        </p:nvSpPr>
-        <p:spPr>
-          <a:xfrm>
-            <a:off x="1028700" y="8584205"/>
-            <a:ext cx="1837581" cy="538480"/>
-          </a:xfrm>
-          <a:prstGeom prst="rect">
-            <a:avLst/>
-          </a:prstGeom>
-          <a:noFill/>
-          <a:ln>
-            <a:noFill/>
-          </a:ln>
-        </p:spPr>
-        <p:txBody>
-          <a:bodyPr anchorCtr="0" anchor="t" bIns="0" lIns="0" spcFirstLastPara="1" rIns="0" wrap="square" tIns="0">
-            <a:spAutoFit/>
-          </a:bodyPr>
-          <a:lstStyle/>
-          <a:p>
-            <a:pPr indent="0" lvl="0" marL="0" marR="0" rtl="0" algn="l">
-              <a:lnSpc>
-                <a:spcPct val="140014"/>
-              </a:lnSpc>
-              <a:spcBef>
-                <a:spcPts val="0"/>
-              </a:spcBef>
-              <a:spcAft>
-                <a:spcPts val="0"/>
-              </a:spcAft>
-              <a:buNone/>
-            </a:pPr>
-            <a:r>
-              <a:rPr b="1" i="0" lang="mn-MN" sz="2799" u="none" cap="none" strike="noStrike">
-                <a:solidFill>
-                  <a:srgbClr val="5C8A00"/>
-                </a:solidFill>
-                <a:latin typeface="Arial"/>
-                <a:ea typeface="Arial"/>
-                <a:cs typeface="Arial"/>
-                <a:sym typeface="Arial"/>
-              </a:rPr>
-              <a:t>Graphican</a:t>
-            </a:r>
-            <a:endParaRPr/>
-          </a:p>
-        </p:txBody>
-      </p:sp>
-      <p:sp>
-        <p:nvSpPr>
-          <p:cNvPr id="296" name="Google Shape;296;p18"/>
-          <p:cNvSpPr txBox="1"/>
-          <p:nvPr/>
-        </p:nvSpPr>
-        <p:spPr>
-          <a:xfrm>
-            <a:off x="1028700" y="9008385"/>
-            <a:ext cx="1837581" cy="538480"/>
-          </a:xfrm>
-          <a:prstGeom prst="rect">
-            <a:avLst/>
-          </a:prstGeom>
-          <a:noFill/>
-          <a:ln>
-            <a:noFill/>
-          </a:ln>
-        </p:spPr>
-        <p:txBody>
-          <a:bodyPr anchorCtr="0" anchor="t" bIns="0" lIns="0" spcFirstLastPara="1" rIns="0" wrap="square" tIns="0">
-            <a:spAutoFit/>
-          </a:bodyPr>
-          <a:lstStyle/>
-          <a:p>
-            <a:pPr indent="0" lvl="0" marL="0" marR="0" rtl="0" algn="l">
-              <a:lnSpc>
-                <a:spcPct val="140014"/>
-              </a:lnSpc>
-              <a:spcBef>
-                <a:spcPts val="0"/>
-              </a:spcBef>
-              <a:spcAft>
-                <a:spcPts val="0"/>
-              </a:spcAft>
-              <a:buNone/>
-            </a:pPr>
-            <a:r>
-              <a:rPr b="1" i="0" lang="mn-MN" sz="2799" u="none" cap="none" strike="noStrike">
-                <a:solidFill>
-                  <a:srgbClr val="5C8A00"/>
-                </a:solidFill>
-                <a:latin typeface="Arial"/>
-                <a:ea typeface="Arial"/>
-                <a:cs typeface="Arial"/>
-                <a:sym typeface="Arial"/>
-              </a:rPr>
-              <a:t>Graphican</a:t>
-            </a:r>
-            <a:endParaRPr/>
-          </a:p>
-        </p:txBody>
-      </p:sp>
-      <p:sp>
-        <p:nvSpPr>
-          <p:cNvPr id="297" name="Google Shape;297;p18"/>
-          <p:cNvSpPr txBox="1"/>
-          <p:nvPr/>
-        </p:nvSpPr>
-        <p:spPr>
-          <a:xfrm>
-            <a:off x="12705109" y="7689360"/>
-            <a:ext cx="4554191" cy="538480"/>
-          </a:xfrm>
-          <a:prstGeom prst="rect">
-            <a:avLst/>
-          </a:prstGeom>
-          <a:noFill/>
-          <a:ln>
-            <a:noFill/>
-          </a:ln>
-        </p:spPr>
-        <p:txBody>
-          <a:bodyPr anchorCtr="0" anchor="t" bIns="0" lIns="0" spcFirstLastPara="1" rIns="0" wrap="square" tIns="0">
-            <a:spAutoFit/>
-          </a:bodyPr>
-          <a:lstStyle/>
-          <a:p>
-            <a:pPr indent="0" lvl="0" marL="0" marR="0" rtl="0" algn="r">
-              <a:lnSpc>
-                <a:spcPct val="140014"/>
-              </a:lnSpc>
-              <a:spcBef>
-                <a:spcPts val="0"/>
-              </a:spcBef>
-              <a:spcAft>
-                <a:spcPts val="0"/>
-              </a:spcAft>
-              <a:buNone/>
-            </a:pPr>
-            <a:r>
-              <a:rPr b="1" i="0" lang="mn-MN" sz="2799" u="none" cap="none" strike="noStrike">
-                <a:solidFill>
-                  <a:srgbClr val="5C8A00"/>
-                </a:solidFill>
-                <a:latin typeface="Arial"/>
-                <a:ea typeface="Arial"/>
-                <a:cs typeface="Arial"/>
-                <a:sym typeface="Arial"/>
-              </a:rPr>
-              <a:t>Бүтээлч слайдууд</a:t>
-            </a:r>
-            <a:endParaRPr/>
-          </a:p>
-        </p:txBody>
-      </p:sp>
-      <p:sp>
-        <p:nvSpPr>
-          <p:cNvPr id="298" name="Google Shape;298;p18"/>
-          <p:cNvSpPr txBox="1"/>
-          <p:nvPr/>
-        </p:nvSpPr>
-        <p:spPr>
-          <a:xfrm>
-            <a:off x="12705109" y="8140946"/>
-            <a:ext cx="4554191" cy="538480"/>
-          </a:xfrm>
-          <a:prstGeom prst="rect">
-            <a:avLst/>
-          </a:prstGeom>
-          <a:noFill/>
-          <a:ln>
-            <a:noFill/>
-          </a:ln>
-        </p:spPr>
-        <p:txBody>
-          <a:bodyPr anchorCtr="0" anchor="t" bIns="0" lIns="0" spcFirstLastPara="1" rIns="0" wrap="square" tIns="0">
-            <a:spAutoFit/>
-          </a:bodyPr>
-          <a:lstStyle/>
-          <a:p>
-            <a:pPr indent="0" lvl="0" marL="0" marR="0" rtl="0" algn="r">
-              <a:lnSpc>
-                <a:spcPct val="140014"/>
-              </a:lnSpc>
-              <a:spcBef>
-                <a:spcPts val="0"/>
-              </a:spcBef>
-              <a:spcAft>
-                <a:spcPts val="0"/>
-              </a:spcAft>
-              <a:buNone/>
-            </a:pPr>
-            <a:r>
-              <a:rPr b="1" i="0" lang="mn-MN" sz="2799" u="none" cap="none" strike="noStrike">
-                <a:solidFill>
-                  <a:srgbClr val="5C8A00"/>
-                </a:solidFill>
-                <a:latin typeface="Arial"/>
-                <a:ea typeface="Arial"/>
-                <a:cs typeface="Arial"/>
-                <a:sym typeface="Arial"/>
-              </a:rPr>
-              <a:t>Бүтээлч слайдууд</a:t>
-            </a:r>
-            <a:endParaRPr/>
-          </a:p>
-        </p:txBody>
-      </p:sp>
-      <p:sp>
-        <p:nvSpPr>
-          <p:cNvPr id="299" name="Google Shape;299;p18"/>
-          <p:cNvSpPr txBox="1"/>
-          <p:nvPr/>
-        </p:nvSpPr>
-        <p:spPr>
-          <a:xfrm>
-            <a:off x="12705109" y="8592532"/>
-            <a:ext cx="4554191" cy="538480"/>
-          </a:xfrm>
-          <a:prstGeom prst="rect">
-            <a:avLst/>
-          </a:prstGeom>
-          <a:noFill/>
-          <a:ln>
-            <a:noFill/>
-          </a:ln>
-        </p:spPr>
-        <p:txBody>
-          <a:bodyPr anchorCtr="0" anchor="t" bIns="0" lIns="0" spcFirstLastPara="1" rIns="0" wrap="square" tIns="0">
-            <a:spAutoFit/>
-          </a:bodyPr>
-          <a:lstStyle/>
-          <a:p>
-            <a:pPr indent="0" lvl="0" marL="0" marR="0" rtl="0" algn="r">
-              <a:lnSpc>
-                <a:spcPct val="140014"/>
-              </a:lnSpc>
-              <a:spcBef>
-                <a:spcPts val="0"/>
-              </a:spcBef>
-              <a:spcAft>
-                <a:spcPts val="0"/>
-              </a:spcAft>
-              <a:buNone/>
-            </a:pPr>
-            <a:r>
-              <a:rPr b="1" i="0" lang="mn-MN" sz="2799" u="none" cap="none" strike="noStrike">
-                <a:solidFill>
-                  <a:srgbClr val="5C8A00"/>
-                </a:solidFill>
-                <a:latin typeface="Arial"/>
-                <a:ea typeface="Arial"/>
-                <a:cs typeface="Arial"/>
-                <a:sym typeface="Arial"/>
-              </a:rPr>
-              <a:t>Бүтээлч слайдууд</a:t>
-            </a:r>
-            <a:endParaRPr/>
-          </a:p>
-        </p:txBody>
-      </p:sp>
-      <p:sp>
-        <p:nvSpPr>
-          <p:cNvPr id="300" name="Google Shape;300;p18"/>
-          <p:cNvSpPr/>
-          <p:nvPr/>
-        </p:nvSpPr>
-        <p:spPr>
-          <a:xfrm flipH="1">
-            <a:off x="2866281" y="0"/>
-            <a:ext cx="12146331" cy="11193853"/>
-          </a:xfrm>
-          <a:custGeom>
-            <a:rect b="b" l="l" r="r" t="t"/>
-            <a:pathLst>
-              <a:path extrusionOk="0" h="11193853" w="12146331">
-                <a:moveTo>
-                  <a:pt x="12146331" y="0"/>
-                </a:moveTo>
-                <a:lnTo>
-                  <a:pt x="0" y="0"/>
-                </a:lnTo>
-                <a:lnTo>
-                  <a:pt x="0" y="11193853"/>
-                </a:lnTo>
-                <a:lnTo>
-                  <a:pt x="12146331" y="11193853"/>
-                </a:lnTo>
-                <a:lnTo>
-                  <a:pt x="12146331" y="0"/>
-                </a:lnTo>
-                <a:close/>
-              </a:path>
-            </a:pathLst>
-          </a:custGeom>
-          <a:blipFill rotWithShape="1">
-            <a:blip r:embed="rId3">
-              <a:alphaModFix/>
-            </a:blip>
-            <a:stretch>
-              <a:fillRect b="0" l="-38236" r="0" t="0"/>
-            </a:stretch>
-          </a:blipFill>
-          <a:ln>
-            <a:noFill/>
-          </a:ln>
-        </p:spPr>
-      </p:sp>
-      <p:sp>
-        <p:nvSpPr>
-          <p:cNvPr id="301" name="Google Shape;301;p18"/>
-          <p:cNvSpPr/>
-          <p:nvPr/>
-        </p:nvSpPr>
-        <p:spPr>
-          <a:xfrm>
-            <a:off x="5699104" y="3571600"/>
-            <a:ext cx="6480660" cy="2859349"/>
-          </a:xfrm>
-          <a:prstGeom prst="rect">
-            <a:avLst/>
-          </a:prstGeom>
-        </p:spPr>
-        <p:txBody>
-          <a:bodyPr>
-            <a:prstTxWarp prst="textPlain"/>
-          </a:bodyPr>
-          <a:lstStyle/>
-          <a:p>
-            <a:pPr lvl="0" algn="ctr"/>
-            <a:r>
-              <a:rPr b="0" i="0">
-                <a:ln cap="flat" cmpd="sng" w="76200">
-                  <a:solidFill>
-                    <a:srgbClr val="8ACE03"/>
-                  </a:solidFill>
-                  <a:prstDash val="solid"/>
-                  <a:round/>
-                  <a:headEnd len="sm" w="sm" type="none"/>
-                  <a:tailEnd len="sm" w="sm" type="none"/>
-                </a:ln>
-                <a:solidFill>
-                  <a:schemeClr val="dk1"/>
-                </a:solidFill>
-                <a:latin typeface="Arial"/>
-              </a:rPr>
-              <a:t>brat</a:t>
-            </a:r>
-          </a:p>
-        </p:txBody>
-      </p:sp>
-    </p:spTree>
-  </p:cSld>
-  <p:clrMapOvr>
-    <a:masterClrMapping/>
-  </p:clrMapOvr>
-</p:sld>
-</file>
-
 <file path=ppt/slides/slide10.xml><?xml version="1.0" encoding="utf-8"?>
 <p:sld xmlns:a="http://schemas.openxmlformats.org/drawingml/2006/main" xmlns:r="http://schemas.openxmlformats.org/officeDocument/2006/relationships" xmlns:mc="http://schemas.openxmlformats.org/markup-compatibility/2006" xmlns:mv="urn:schemas-microsoft-com:mac:vml" xmlns:p="http://schemas.openxmlformats.org/presentationml/2006/main" xmlns:c="http://schemas.openxmlformats.org/drawingml/2006/chart" xmlns:dgm="http://schemas.openxmlformats.org/drawingml/2006/diagram" xmlns:o="urn:schemas-microsoft-com:office:office" xmlns:v="urn:schemas-microsoft-com:vml" xmlns:pvml="urn:schemas-microsoft-com:office:powerpoint" xmlns:com="http://schemas.openxmlformats.org/drawingml/2006/compatibility" xmlns:p14="http://schemas.microsoft.com/office/powerpoint/2010/main" xmlns:p15="http://schemas.microsoft.com/office/powerpoint/2012/main" xmlns:ahyp="http://schemas.microsoft.com/office/drawing/2018/hyperlinkcolor">
   <p:cSld>
@@ -20004,7 +17868,7 @@
                 <a:cs typeface="Arial"/>
                 <a:sym typeface="Arial"/>
               </a:rPr>
-              <a:t>Технологийн шинэчлэлийг тасралтгүй нэвтрүүлнэ. Энд гол санаагаа бичнэ үү. </a:t>
+              <a:t>Чанар, хурд, найдвартай байдлыг эрхэмлэнэ. Шинэ боломжийг цаг алдалгүй ашиглана. </a:t>
             </a:r>
             <a:endParaRPr/>
           </a:p>
@@ -20163,7 +18027,7 @@
                 <a:cs typeface="Arial"/>
                 <a:sym typeface="Arial"/>
               </a:rPr>
-              <a:t>Товч бөгөөд ойлгомжтой тайлбар. Үзэгчдэд хэрэгтэй мэдээллийг өгнө. </a:t>
+              <a:t>Үр дүнд суурилсан шийдлийг санал болгоно. Харилцагчидтайгаа урт хугацааны түншлэл тогтооно. </a:t>
             </a:r>
             <a:endParaRPr/>
           </a:p>
@@ -20589,7 +18453,7 @@
                 <a:cs typeface="Arial"/>
                 <a:sym typeface="Arial"/>
               </a:rPr>
-              <a:t>Чанар, хурд, найдвартай байдлыг эрхэмлэнэ. Шинэ боломжийг цаг алдалгүй ашиглана. </a:t>
+              <a:t>Өсөлтийг тогтмол хэмжиж, сайжруулна. Энэ хэсэгт өөрийн текстээ оруулна уу. </a:t>
             </a:r>
             <a:endParaRPr/>
           </a:p>
@@ -20721,7 +18585,7 @@
                 <a:cs typeface="Arial"/>
                 <a:sym typeface="Arial"/>
               </a:rPr>
-              <a:t>Үр дүнд суурилсан шийдлийг санал болгоно. Харилцагчидтайгаа урт хугацааны түншлэл тогтооно. </a:t>
+              <a:t>Гол үзүүлэлтүүдээ товч дурдана. Хэрэглэгчийн хэрэгцээг нарийн судална. </a:t>
             </a:r>
             <a:endParaRPr/>
           </a:p>
@@ -20853,7 +18717,7 @@
                 <a:cs typeface="Arial"/>
                 <a:sym typeface="Arial"/>
               </a:rPr>
-              <a:t>Технологийн шинэчлэлийг тасралтгүй нэвтрүүлнэ. Энд гол санаагаа бичнэ үү. </a:t>
+              <a:t>Чанар, хурд, найдвартай байдлыг эрхэмлэнэ. Шинэ боломжийг цаг алдалгүй ашиглана. </a:t>
             </a:r>
             <a:endParaRPr/>
           </a:p>
@@ -21546,7 +19410,7 @@
                 <a:cs typeface="Arial"/>
                 <a:sym typeface="Arial"/>
               </a:rPr>
-              <a:t>Тоо баримт, жишээ ашиглавал илүү үр дүнтэй. Бид хэрэглэгчдэдээ үнэ цэн бүтээхийг зорьдог. Төслийн явц, үр дүнг энд харуулна. Багаараа хамтран шинэ шийдэл хэрэгжүүлнэ. </a:t>
+              <a:t>Технологийн шинэчлэлийг тасралтгүй нэвтрүүлнэ. Энд гол санаагаа бичнэ үү. Товч бөгөөд ойлгомжтой тайлбар. Үзэгчдэд хэрэгтэй мэдээллийг өгнө. </a:t>
             </a:r>
             <a:endParaRPr/>
           </a:p>
@@ -24753,6 +22617,2144 @@
 </p:sld>
 </file>
 
+<file path=ppt/slides/slide18.xml><?xml version="1.0" encoding="utf-8"?>
+<p:sld xmlns:a="http://schemas.openxmlformats.org/drawingml/2006/main" xmlns:r="http://schemas.openxmlformats.org/officeDocument/2006/relationships" xmlns:mc="http://schemas.openxmlformats.org/markup-compatibility/2006" xmlns:mv="urn:schemas-microsoft-com:mac:vml" xmlns:p="http://schemas.openxmlformats.org/presentationml/2006/main" xmlns:c="http://schemas.openxmlformats.org/drawingml/2006/chart" xmlns:dgm="http://schemas.openxmlformats.org/drawingml/2006/diagram" xmlns:o="urn:schemas-microsoft-com:office:office" xmlns:v="urn:schemas-microsoft-com:vml" xmlns:pvml="urn:schemas-microsoft-com:office:powerpoint" xmlns:com="http://schemas.openxmlformats.org/drawingml/2006/compatibility" xmlns:p14="http://schemas.microsoft.com/office/powerpoint/2010/main" xmlns:p15="http://schemas.microsoft.com/office/powerpoint/2012/main" xmlns:ahyp="http://schemas.microsoft.com/office/drawing/2018/hyperlinkcolor">
+  <p:cSld>
+    <p:bg>
+      <p:bgPr>
+        <a:solidFill>
+          <a:srgbClr val="000000"/>
+        </a:solidFill>
+        <a:effectLst/>
+      </p:bgPr>
+    </p:bg>
+    <p:spTree>
+      <p:nvGrpSpPr>
+        <p:cNvPr id="261" name="Shape 261"/>
+        <p:cNvGrpSpPr/>
+        <p:nvPr/>
+      </p:nvGrpSpPr>
+      <p:grpSpPr>
+        <a:xfrm>
+          <a:off x="0" y="0"/>
+          <a:ext cx="0" cy="0"/>
+          <a:chOff x="0" y="0"/>
+          <a:chExt cx="0" cy="0"/>
+        </a:xfrm>
+      </p:grpSpPr>
+      <p:sp>
+        <p:nvSpPr>
+          <p:cNvPr id="262" name="Google Shape;262;p18"/>
+          <p:cNvSpPr txBox="1"/>
+          <p:nvPr/>
+        </p:nvSpPr>
+        <p:spPr>
+          <a:xfrm>
+            <a:off x="15421719" y="914400"/>
+            <a:ext cx="1837581" cy="538480"/>
+          </a:xfrm>
+          <a:prstGeom prst="rect">
+            <a:avLst/>
+          </a:prstGeom>
+          <a:noFill/>
+          <a:ln>
+            <a:noFill/>
+          </a:ln>
+        </p:spPr>
+        <p:txBody>
+          <a:bodyPr anchorCtr="0" anchor="t" bIns="0" lIns="0" spcFirstLastPara="1" rIns="0" wrap="square" tIns="0">
+            <a:spAutoFit/>
+          </a:bodyPr>
+          <a:lstStyle/>
+          <a:p>
+            <a:pPr indent="0" lvl="0" marL="0" marR="0" rtl="0" algn="r">
+              <a:lnSpc>
+                <a:spcPct val="140014"/>
+              </a:lnSpc>
+              <a:spcBef>
+                <a:spcPts val="0"/>
+              </a:spcBef>
+              <a:spcAft>
+                <a:spcPts val="0"/>
+              </a:spcAft>
+              <a:buNone/>
+            </a:pPr>
+            <a:r>
+              <a:rPr b="1" i="0" lang="mn-MN" sz="2799" u="none" cap="none" strike="noStrike">
+                <a:solidFill>
+                  <a:srgbClr val="8ACE03"/>
+                </a:solidFill>
+                <a:latin typeface="Arial"/>
+                <a:ea typeface="Arial"/>
+                <a:cs typeface="Arial"/>
+                <a:sym typeface="Arial"/>
+              </a:rPr>
+              <a:t>Graphican</a:t>
+            </a:r>
+            <a:endParaRPr/>
+          </a:p>
+        </p:txBody>
+      </p:sp>
+      <p:sp>
+        <p:nvSpPr>
+          <p:cNvPr id="263" name="Google Shape;263;p18"/>
+          <p:cNvSpPr txBox="1"/>
+          <p:nvPr/>
+        </p:nvSpPr>
+        <p:spPr>
+          <a:xfrm>
+            <a:off x="1028700" y="914400"/>
+            <a:ext cx="4554191" cy="538480"/>
+          </a:xfrm>
+          <a:prstGeom prst="rect">
+            <a:avLst/>
+          </a:prstGeom>
+          <a:noFill/>
+          <a:ln>
+            <a:noFill/>
+          </a:ln>
+        </p:spPr>
+        <p:txBody>
+          <a:bodyPr anchorCtr="0" anchor="t" bIns="0" lIns="0" spcFirstLastPara="1" rIns="0" wrap="square" tIns="0">
+            <a:spAutoFit/>
+          </a:bodyPr>
+          <a:lstStyle/>
+          <a:p>
+            <a:pPr indent="0" lvl="0" marL="0" marR="0" rtl="0" algn="l">
+              <a:lnSpc>
+                <a:spcPct val="140014"/>
+              </a:lnSpc>
+              <a:spcBef>
+                <a:spcPts val="0"/>
+              </a:spcBef>
+              <a:spcAft>
+                <a:spcPts val="0"/>
+              </a:spcAft>
+              <a:buNone/>
+            </a:pPr>
+            <a:r>
+              <a:rPr b="1" i="0" lang="mn-MN" sz="2799" u="none" cap="none" strike="noStrike">
+                <a:solidFill>
+                  <a:srgbClr val="8ACE03"/>
+                </a:solidFill>
+                <a:latin typeface="Arial"/>
+                <a:ea typeface="Arial"/>
+                <a:cs typeface="Arial"/>
+                <a:sym typeface="Arial"/>
+              </a:rPr>
+              <a:t>2-р хэсэг</a:t>
+            </a:r>
+            <a:endParaRPr/>
+          </a:p>
+        </p:txBody>
+      </p:sp>
+      <p:sp>
+        <p:nvSpPr>
+          <p:cNvPr id="264" name="Google Shape;264;p18"/>
+          <p:cNvSpPr txBox="1"/>
+          <p:nvPr/>
+        </p:nvSpPr>
+        <p:spPr>
+          <a:xfrm>
+            <a:off x="15421719" y="1338580"/>
+            <a:ext cx="1837581" cy="538480"/>
+          </a:xfrm>
+          <a:prstGeom prst="rect">
+            <a:avLst/>
+          </a:prstGeom>
+          <a:noFill/>
+          <a:ln>
+            <a:noFill/>
+          </a:ln>
+        </p:spPr>
+        <p:txBody>
+          <a:bodyPr anchorCtr="0" anchor="t" bIns="0" lIns="0" spcFirstLastPara="1" rIns="0" wrap="square" tIns="0">
+            <a:spAutoFit/>
+          </a:bodyPr>
+          <a:lstStyle/>
+          <a:p>
+            <a:pPr indent="0" lvl="0" marL="0" marR="0" rtl="0" algn="r">
+              <a:lnSpc>
+                <a:spcPct val="140014"/>
+              </a:lnSpc>
+              <a:spcBef>
+                <a:spcPts val="0"/>
+              </a:spcBef>
+              <a:spcAft>
+                <a:spcPts val="0"/>
+              </a:spcAft>
+              <a:buNone/>
+            </a:pPr>
+            <a:r>
+              <a:rPr b="1" i="0" lang="mn-MN" sz="2799" u="none" cap="none" strike="noStrike">
+                <a:solidFill>
+                  <a:srgbClr val="3F6100"/>
+                </a:solidFill>
+                <a:latin typeface="Arial"/>
+                <a:ea typeface="Arial"/>
+                <a:cs typeface="Arial"/>
+                <a:sym typeface="Arial"/>
+              </a:rPr>
+              <a:t>Graphican</a:t>
+            </a:r>
+            <a:endParaRPr/>
+          </a:p>
+        </p:txBody>
+      </p:sp>
+      <p:sp>
+        <p:nvSpPr>
+          <p:cNvPr id="265" name="Google Shape;265;p18"/>
+          <p:cNvSpPr txBox="1"/>
+          <p:nvPr/>
+        </p:nvSpPr>
+        <p:spPr>
+          <a:xfrm>
+            <a:off x="15421719" y="1762760"/>
+            <a:ext cx="1837581" cy="538480"/>
+          </a:xfrm>
+          <a:prstGeom prst="rect">
+            <a:avLst/>
+          </a:prstGeom>
+          <a:noFill/>
+          <a:ln>
+            <a:noFill/>
+          </a:ln>
+        </p:spPr>
+        <p:txBody>
+          <a:bodyPr anchorCtr="0" anchor="t" bIns="0" lIns="0" spcFirstLastPara="1" rIns="0" wrap="square" tIns="0">
+            <a:spAutoFit/>
+          </a:bodyPr>
+          <a:lstStyle/>
+          <a:p>
+            <a:pPr indent="0" lvl="0" marL="0" marR="0" rtl="0" algn="r">
+              <a:lnSpc>
+                <a:spcPct val="140014"/>
+              </a:lnSpc>
+              <a:spcBef>
+                <a:spcPts val="0"/>
+              </a:spcBef>
+              <a:spcAft>
+                <a:spcPts val="0"/>
+              </a:spcAft>
+              <a:buNone/>
+            </a:pPr>
+            <a:r>
+              <a:rPr b="1" i="0" lang="mn-MN" sz="2799" u="none" cap="none" strike="noStrike">
+                <a:solidFill>
+                  <a:srgbClr val="3F6100"/>
+                </a:solidFill>
+                <a:latin typeface="Arial"/>
+                <a:ea typeface="Arial"/>
+                <a:cs typeface="Arial"/>
+                <a:sym typeface="Arial"/>
+              </a:rPr>
+              <a:t>Graphican</a:t>
+            </a:r>
+            <a:endParaRPr/>
+          </a:p>
+        </p:txBody>
+      </p:sp>
+      <p:sp>
+        <p:nvSpPr>
+          <p:cNvPr id="266" name="Google Shape;266;p18"/>
+          <p:cNvSpPr txBox="1"/>
+          <p:nvPr/>
+        </p:nvSpPr>
+        <p:spPr>
+          <a:xfrm>
+            <a:off x="15421719" y="2186940"/>
+            <a:ext cx="1837581" cy="538480"/>
+          </a:xfrm>
+          <a:prstGeom prst="rect">
+            <a:avLst/>
+          </a:prstGeom>
+          <a:noFill/>
+          <a:ln>
+            <a:noFill/>
+          </a:ln>
+        </p:spPr>
+        <p:txBody>
+          <a:bodyPr anchorCtr="0" anchor="t" bIns="0" lIns="0" spcFirstLastPara="1" rIns="0" wrap="square" tIns="0">
+            <a:spAutoFit/>
+          </a:bodyPr>
+          <a:lstStyle/>
+          <a:p>
+            <a:pPr indent="0" lvl="0" marL="0" marR="0" rtl="0" algn="r">
+              <a:lnSpc>
+                <a:spcPct val="140014"/>
+              </a:lnSpc>
+              <a:spcBef>
+                <a:spcPts val="0"/>
+              </a:spcBef>
+              <a:spcAft>
+                <a:spcPts val="0"/>
+              </a:spcAft>
+              <a:buNone/>
+            </a:pPr>
+            <a:r>
+              <a:rPr b="1" i="0" lang="mn-MN" sz="2799" u="none" cap="none" strike="noStrike">
+                <a:solidFill>
+                  <a:srgbClr val="3F6100"/>
+                </a:solidFill>
+                <a:latin typeface="Arial"/>
+                <a:ea typeface="Arial"/>
+                <a:cs typeface="Arial"/>
+                <a:sym typeface="Arial"/>
+              </a:rPr>
+              <a:t>Graphican</a:t>
+            </a:r>
+            <a:endParaRPr/>
+          </a:p>
+        </p:txBody>
+      </p:sp>
+      <p:sp>
+        <p:nvSpPr>
+          <p:cNvPr id="267" name="Google Shape;267;p18"/>
+          <p:cNvSpPr txBox="1"/>
+          <p:nvPr/>
+        </p:nvSpPr>
+        <p:spPr>
+          <a:xfrm>
+            <a:off x="15421719" y="2611120"/>
+            <a:ext cx="1837581" cy="538480"/>
+          </a:xfrm>
+          <a:prstGeom prst="rect">
+            <a:avLst/>
+          </a:prstGeom>
+          <a:noFill/>
+          <a:ln>
+            <a:noFill/>
+          </a:ln>
+        </p:spPr>
+        <p:txBody>
+          <a:bodyPr anchorCtr="0" anchor="t" bIns="0" lIns="0" spcFirstLastPara="1" rIns="0" wrap="square" tIns="0">
+            <a:spAutoFit/>
+          </a:bodyPr>
+          <a:lstStyle/>
+          <a:p>
+            <a:pPr indent="0" lvl="0" marL="0" marR="0" rtl="0" algn="r">
+              <a:lnSpc>
+                <a:spcPct val="140014"/>
+              </a:lnSpc>
+              <a:spcBef>
+                <a:spcPts val="0"/>
+              </a:spcBef>
+              <a:spcAft>
+                <a:spcPts val="0"/>
+              </a:spcAft>
+              <a:buNone/>
+            </a:pPr>
+            <a:r>
+              <a:rPr b="1" i="0" lang="mn-MN" sz="2799" u="none" cap="none" strike="noStrike">
+                <a:solidFill>
+                  <a:srgbClr val="3F6100"/>
+                </a:solidFill>
+                <a:latin typeface="Arial"/>
+                <a:ea typeface="Arial"/>
+                <a:cs typeface="Arial"/>
+                <a:sym typeface="Arial"/>
+              </a:rPr>
+              <a:t>Graphican</a:t>
+            </a:r>
+            <a:endParaRPr/>
+          </a:p>
+        </p:txBody>
+      </p:sp>
+      <p:sp>
+        <p:nvSpPr>
+          <p:cNvPr id="268" name="Google Shape;268;p18"/>
+          <p:cNvSpPr txBox="1"/>
+          <p:nvPr/>
+        </p:nvSpPr>
+        <p:spPr>
+          <a:xfrm>
+            <a:off x="15421719" y="3035300"/>
+            <a:ext cx="1837581" cy="538480"/>
+          </a:xfrm>
+          <a:prstGeom prst="rect">
+            <a:avLst/>
+          </a:prstGeom>
+          <a:noFill/>
+          <a:ln>
+            <a:noFill/>
+          </a:ln>
+        </p:spPr>
+        <p:txBody>
+          <a:bodyPr anchorCtr="0" anchor="t" bIns="0" lIns="0" spcFirstLastPara="1" rIns="0" wrap="square" tIns="0">
+            <a:spAutoFit/>
+          </a:bodyPr>
+          <a:lstStyle/>
+          <a:p>
+            <a:pPr indent="0" lvl="0" marL="0" marR="0" rtl="0" algn="r">
+              <a:lnSpc>
+                <a:spcPct val="140014"/>
+              </a:lnSpc>
+              <a:spcBef>
+                <a:spcPts val="0"/>
+              </a:spcBef>
+              <a:spcAft>
+                <a:spcPts val="0"/>
+              </a:spcAft>
+              <a:buNone/>
+            </a:pPr>
+            <a:r>
+              <a:rPr b="1" i="0" lang="mn-MN" sz="2799" u="none" cap="none" strike="noStrike">
+                <a:solidFill>
+                  <a:srgbClr val="3F6100"/>
+                </a:solidFill>
+                <a:latin typeface="Arial"/>
+                <a:ea typeface="Arial"/>
+                <a:cs typeface="Arial"/>
+                <a:sym typeface="Arial"/>
+              </a:rPr>
+              <a:t>Graphican</a:t>
+            </a:r>
+            <a:endParaRPr/>
+          </a:p>
+        </p:txBody>
+      </p:sp>
+      <p:sp>
+        <p:nvSpPr>
+          <p:cNvPr id="269" name="Google Shape;269;p18"/>
+          <p:cNvSpPr txBox="1"/>
+          <p:nvPr/>
+        </p:nvSpPr>
+        <p:spPr>
+          <a:xfrm>
+            <a:off x="15421719" y="3459480"/>
+            <a:ext cx="1837581" cy="538480"/>
+          </a:xfrm>
+          <a:prstGeom prst="rect">
+            <a:avLst/>
+          </a:prstGeom>
+          <a:noFill/>
+          <a:ln>
+            <a:noFill/>
+          </a:ln>
+        </p:spPr>
+        <p:txBody>
+          <a:bodyPr anchorCtr="0" anchor="t" bIns="0" lIns="0" spcFirstLastPara="1" rIns="0" wrap="square" tIns="0">
+            <a:spAutoFit/>
+          </a:bodyPr>
+          <a:lstStyle/>
+          <a:p>
+            <a:pPr indent="0" lvl="0" marL="0" marR="0" rtl="0" algn="r">
+              <a:lnSpc>
+                <a:spcPct val="140014"/>
+              </a:lnSpc>
+              <a:spcBef>
+                <a:spcPts val="0"/>
+              </a:spcBef>
+              <a:spcAft>
+                <a:spcPts val="0"/>
+              </a:spcAft>
+              <a:buNone/>
+            </a:pPr>
+            <a:r>
+              <a:rPr b="1" i="0" lang="mn-MN" sz="2799" u="none" cap="none" strike="noStrike">
+                <a:solidFill>
+                  <a:srgbClr val="3F6100"/>
+                </a:solidFill>
+                <a:latin typeface="Arial"/>
+                <a:ea typeface="Arial"/>
+                <a:cs typeface="Arial"/>
+                <a:sym typeface="Arial"/>
+              </a:rPr>
+              <a:t>Graphican</a:t>
+            </a:r>
+            <a:endParaRPr/>
+          </a:p>
+        </p:txBody>
+      </p:sp>
+      <p:sp>
+        <p:nvSpPr>
+          <p:cNvPr id="270" name="Google Shape;270;p18"/>
+          <p:cNvSpPr txBox="1"/>
+          <p:nvPr/>
+        </p:nvSpPr>
+        <p:spPr>
+          <a:xfrm>
+            <a:off x="15421719" y="3883660"/>
+            <a:ext cx="1837581" cy="538480"/>
+          </a:xfrm>
+          <a:prstGeom prst="rect">
+            <a:avLst/>
+          </a:prstGeom>
+          <a:noFill/>
+          <a:ln>
+            <a:noFill/>
+          </a:ln>
+        </p:spPr>
+        <p:txBody>
+          <a:bodyPr anchorCtr="0" anchor="t" bIns="0" lIns="0" spcFirstLastPara="1" rIns="0" wrap="square" tIns="0">
+            <a:spAutoFit/>
+          </a:bodyPr>
+          <a:lstStyle/>
+          <a:p>
+            <a:pPr indent="0" lvl="0" marL="0" marR="0" rtl="0" algn="r">
+              <a:lnSpc>
+                <a:spcPct val="140014"/>
+              </a:lnSpc>
+              <a:spcBef>
+                <a:spcPts val="0"/>
+              </a:spcBef>
+              <a:spcAft>
+                <a:spcPts val="0"/>
+              </a:spcAft>
+              <a:buNone/>
+            </a:pPr>
+            <a:r>
+              <a:rPr b="1" i="0" lang="mn-MN" sz="2799" u="none" cap="none" strike="noStrike">
+                <a:solidFill>
+                  <a:srgbClr val="3F6100"/>
+                </a:solidFill>
+                <a:latin typeface="Arial"/>
+                <a:ea typeface="Arial"/>
+                <a:cs typeface="Arial"/>
+                <a:sym typeface="Arial"/>
+              </a:rPr>
+              <a:t>Graphican</a:t>
+            </a:r>
+            <a:endParaRPr/>
+          </a:p>
+        </p:txBody>
+      </p:sp>
+      <p:sp>
+        <p:nvSpPr>
+          <p:cNvPr id="271" name="Google Shape;271;p18"/>
+          <p:cNvSpPr txBox="1"/>
+          <p:nvPr/>
+        </p:nvSpPr>
+        <p:spPr>
+          <a:xfrm>
+            <a:off x="15421719" y="4307841"/>
+            <a:ext cx="1837581" cy="538480"/>
+          </a:xfrm>
+          <a:prstGeom prst="rect">
+            <a:avLst/>
+          </a:prstGeom>
+          <a:noFill/>
+          <a:ln>
+            <a:noFill/>
+          </a:ln>
+        </p:spPr>
+        <p:txBody>
+          <a:bodyPr anchorCtr="0" anchor="t" bIns="0" lIns="0" spcFirstLastPara="1" rIns="0" wrap="square" tIns="0">
+            <a:spAutoFit/>
+          </a:bodyPr>
+          <a:lstStyle/>
+          <a:p>
+            <a:pPr indent="0" lvl="0" marL="0" marR="0" rtl="0" algn="r">
+              <a:lnSpc>
+                <a:spcPct val="140014"/>
+              </a:lnSpc>
+              <a:spcBef>
+                <a:spcPts val="0"/>
+              </a:spcBef>
+              <a:spcAft>
+                <a:spcPts val="0"/>
+              </a:spcAft>
+              <a:buNone/>
+            </a:pPr>
+            <a:r>
+              <a:rPr b="1" i="0" lang="mn-MN" sz="2799" u="none" cap="none" strike="noStrike">
+                <a:solidFill>
+                  <a:srgbClr val="3F6100"/>
+                </a:solidFill>
+                <a:latin typeface="Arial"/>
+                <a:ea typeface="Arial"/>
+                <a:cs typeface="Arial"/>
+                <a:sym typeface="Arial"/>
+              </a:rPr>
+              <a:t>Graphican</a:t>
+            </a:r>
+            <a:endParaRPr/>
+          </a:p>
+        </p:txBody>
+      </p:sp>
+      <p:sp>
+        <p:nvSpPr>
+          <p:cNvPr id="272" name="Google Shape;272;p18"/>
+          <p:cNvSpPr txBox="1"/>
+          <p:nvPr/>
+        </p:nvSpPr>
+        <p:spPr>
+          <a:xfrm>
+            <a:off x="15421719" y="4732021"/>
+            <a:ext cx="1837581" cy="538480"/>
+          </a:xfrm>
+          <a:prstGeom prst="rect">
+            <a:avLst/>
+          </a:prstGeom>
+          <a:noFill/>
+          <a:ln>
+            <a:noFill/>
+          </a:ln>
+        </p:spPr>
+        <p:txBody>
+          <a:bodyPr anchorCtr="0" anchor="t" bIns="0" lIns="0" spcFirstLastPara="1" rIns="0" wrap="square" tIns="0">
+            <a:spAutoFit/>
+          </a:bodyPr>
+          <a:lstStyle/>
+          <a:p>
+            <a:pPr indent="0" lvl="0" marL="0" marR="0" rtl="0" algn="r">
+              <a:lnSpc>
+                <a:spcPct val="140014"/>
+              </a:lnSpc>
+              <a:spcBef>
+                <a:spcPts val="0"/>
+              </a:spcBef>
+              <a:spcAft>
+                <a:spcPts val="0"/>
+              </a:spcAft>
+              <a:buNone/>
+            </a:pPr>
+            <a:r>
+              <a:rPr b="1" i="0" lang="mn-MN" sz="2799" u="none" cap="none" strike="noStrike">
+                <a:solidFill>
+                  <a:srgbClr val="3F6100"/>
+                </a:solidFill>
+                <a:latin typeface="Arial"/>
+                <a:ea typeface="Arial"/>
+                <a:cs typeface="Arial"/>
+                <a:sym typeface="Arial"/>
+              </a:rPr>
+              <a:t>Graphican</a:t>
+            </a:r>
+            <a:endParaRPr/>
+          </a:p>
+        </p:txBody>
+      </p:sp>
+      <p:sp>
+        <p:nvSpPr>
+          <p:cNvPr id="273" name="Google Shape;273;p18"/>
+          <p:cNvSpPr txBox="1"/>
+          <p:nvPr/>
+        </p:nvSpPr>
+        <p:spPr>
+          <a:xfrm>
+            <a:off x="1028700" y="1365986"/>
+            <a:ext cx="4554191" cy="538480"/>
+          </a:xfrm>
+          <a:prstGeom prst="rect">
+            <a:avLst/>
+          </a:prstGeom>
+          <a:noFill/>
+          <a:ln>
+            <a:noFill/>
+          </a:ln>
+        </p:spPr>
+        <p:txBody>
+          <a:bodyPr anchorCtr="0" anchor="t" bIns="0" lIns="0" spcFirstLastPara="1" rIns="0" wrap="square" tIns="0">
+            <a:spAutoFit/>
+          </a:bodyPr>
+          <a:lstStyle/>
+          <a:p>
+            <a:pPr indent="0" lvl="0" marL="0" marR="0" rtl="0" algn="l">
+              <a:lnSpc>
+                <a:spcPct val="140014"/>
+              </a:lnSpc>
+              <a:spcBef>
+                <a:spcPts val="0"/>
+              </a:spcBef>
+              <a:spcAft>
+                <a:spcPts val="0"/>
+              </a:spcAft>
+              <a:buNone/>
+            </a:pPr>
+            <a:r>
+              <a:rPr b="1" i="0" lang="mn-MN" sz="2799" u="none" cap="none" strike="noStrike">
+                <a:solidFill>
+                  <a:srgbClr val="3F6100"/>
+                </a:solidFill>
+                <a:latin typeface="Arial"/>
+                <a:ea typeface="Arial"/>
+                <a:cs typeface="Arial"/>
+                <a:sym typeface="Arial"/>
+              </a:rPr>
+              <a:t>2-р хэсэг</a:t>
+            </a:r>
+            <a:endParaRPr/>
+          </a:p>
+        </p:txBody>
+      </p:sp>
+      <p:sp>
+        <p:nvSpPr>
+          <p:cNvPr id="274" name="Google Shape;274;p18"/>
+          <p:cNvSpPr txBox="1"/>
+          <p:nvPr/>
+        </p:nvSpPr>
+        <p:spPr>
+          <a:xfrm>
+            <a:off x="1028700" y="1817572"/>
+            <a:ext cx="4554191" cy="538480"/>
+          </a:xfrm>
+          <a:prstGeom prst="rect">
+            <a:avLst/>
+          </a:prstGeom>
+          <a:noFill/>
+          <a:ln>
+            <a:noFill/>
+          </a:ln>
+        </p:spPr>
+        <p:txBody>
+          <a:bodyPr anchorCtr="0" anchor="t" bIns="0" lIns="0" spcFirstLastPara="1" rIns="0" wrap="square" tIns="0">
+            <a:spAutoFit/>
+          </a:bodyPr>
+          <a:lstStyle/>
+          <a:p>
+            <a:pPr indent="0" lvl="0" marL="0" marR="0" rtl="0" algn="l">
+              <a:lnSpc>
+                <a:spcPct val="140014"/>
+              </a:lnSpc>
+              <a:spcBef>
+                <a:spcPts val="0"/>
+              </a:spcBef>
+              <a:spcAft>
+                <a:spcPts val="0"/>
+              </a:spcAft>
+              <a:buNone/>
+            </a:pPr>
+            <a:r>
+              <a:rPr b="1" i="0" lang="mn-MN" sz="2799" u="none" cap="none" strike="noStrike">
+                <a:solidFill>
+                  <a:srgbClr val="3F6100"/>
+                </a:solidFill>
+                <a:latin typeface="Arial"/>
+                <a:ea typeface="Arial"/>
+                <a:cs typeface="Arial"/>
+                <a:sym typeface="Arial"/>
+              </a:rPr>
+              <a:t>2-р хэсэг</a:t>
+            </a:r>
+            <a:endParaRPr/>
+          </a:p>
+        </p:txBody>
+      </p:sp>
+      <p:sp>
+        <p:nvSpPr>
+          <p:cNvPr id="275" name="Google Shape;275;p18"/>
+          <p:cNvSpPr txBox="1"/>
+          <p:nvPr/>
+        </p:nvSpPr>
+        <p:spPr>
+          <a:xfrm>
+            <a:off x="1028700" y="2269158"/>
+            <a:ext cx="4554191" cy="538480"/>
+          </a:xfrm>
+          <a:prstGeom prst="rect">
+            <a:avLst/>
+          </a:prstGeom>
+          <a:noFill/>
+          <a:ln>
+            <a:noFill/>
+          </a:ln>
+        </p:spPr>
+        <p:txBody>
+          <a:bodyPr anchorCtr="0" anchor="t" bIns="0" lIns="0" spcFirstLastPara="1" rIns="0" wrap="square" tIns="0">
+            <a:spAutoFit/>
+          </a:bodyPr>
+          <a:lstStyle/>
+          <a:p>
+            <a:pPr indent="0" lvl="0" marL="0" marR="0" rtl="0" algn="l">
+              <a:lnSpc>
+                <a:spcPct val="140014"/>
+              </a:lnSpc>
+              <a:spcBef>
+                <a:spcPts val="0"/>
+              </a:spcBef>
+              <a:spcAft>
+                <a:spcPts val="0"/>
+              </a:spcAft>
+              <a:buNone/>
+            </a:pPr>
+            <a:r>
+              <a:rPr b="1" i="0" lang="mn-MN" sz="2799" u="none" cap="none" strike="noStrike">
+                <a:solidFill>
+                  <a:srgbClr val="3F6100"/>
+                </a:solidFill>
+                <a:latin typeface="Arial"/>
+                <a:ea typeface="Arial"/>
+                <a:cs typeface="Arial"/>
+                <a:sym typeface="Arial"/>
+              </a:rPr>
+              <a:t>2-р хэсэг</a:t>
+            </a:r>
+            <a:endParaRPr/>
+          </a:p>
+        </p:txBody>
+      </p:sp>
+      <p:sp>
+        <p:nvSpPr>
+          <p:cNvPr id="276" name="Google Shape;276;p18"/>
+          <p:cNvSpPr txBox="1"/>
+          <p:nvPr/>
+        </p:nvSpPr>
+        <p:spPr>
+          <a:xfrm>
+            <a:off x="1028700" y="2720744"/>
+            <a:ext cx="4554191" cy="538480"/>
+          </a:xfrm>
+          <a:prstGeom prst="rect">
+            <a:avLst/>
+          </a:prstGeom>
+          <a:noFill/>
+          <a:ln>
+            <a:noFill/>
+          </a:ln>
+        </p:spPr>
+        <p:txBody>
+          <a:bodyPr anchorCtr="0" anchor="t" bIns="0" lIns="0" spcFirstLastPara="1" rIns="0" wrap="square" tIns="0">
+            <a:spAutoFit/>
+          </a:bodyPr>
+          <a:lstStyle/>
+          <a:p>
+            <a:pPr indent="0" lvl="0" marL="0" marR="0" rtl="0" algn="l">
+              <a:lnSpc>
+                <a:spcPct val="140014"/>
+              </a:lnSpc>
+              <a:spcBef>
+                <a:spcPts val="0"/>
+              </a:spcBef>
+              <a:spcAft>
+                <a:spcPts val="0"/>
+              </a:spcAft>
+              <a:buNone/>
+            </a:pPr>
+            <a:r>
+              <a:rPr b="1" i="0" lang="mn-MN" sz="2799" u="none" cap="none" strike="noStrike">
+                <a:solidFill>
+                  <a:srgbClr val="3F6100"/>
+                </a:solidFill>
+                <a:latin typeface="Arial"/>
+                <a:ea typeface="Arial"/>
+                <a:cs typeface="Arial"/>
+                <a:sym typeface="Arial"/>
+              </a:rPr>
+              <a:t>2-р хэсэг</a:t>
+            </a:r>
+            <a:endParaRPr/>
+          </a:p>
+        </p:txBody>
+      </p:sp>
+      <p:sp>
+        <p:nvSpPr>
+          <p:cNvPr id="277" name="Google Shape;277;p18"/>
+          <p:cNvSpPr txBox="1"/>
+          <p:nvPr/>
+        </p:nvSpPr>
+        <p:spPr>
+          <a:xfrm>
+            <a:off x="1028700" y="3172330"/>
+            <a:ext cx="4554191" cy="538480"/>
+          </a:xfrm>
+          <a:prstGeom prst="rect">
+            <a:avLst/>
+          </a:prstGeom>
+          <a:noFill/>
+          <a:ln>
+            <a:noFill/>
+          </a:ln>
+        </p:spPr>
+        <p:txBody>
+          <a:bodyPr anchorCtr="0" anchor="t" bIns="0" lIns="0" spcFirstLastPara="1" rIns="0" wrap="square" tIns="0">
+            <a:spAutoFit/>
+          </a:bodyPr>
+          <a:lstStyle/>
+          <a:p>
+            <a:pPr indent="0" lvl="0" marL="0" marR="0" rtl="0" algn="l">
+              <a:lnSpc>
+                <a:spcPct val="140014"/>
+              </a:lnSpc>
+              <a:spcBef>
+                <a:spcPts val="0"/>
+              </a:spcBef>
+              <a:spcAft>
+                <a:spcPts val="0"/>
+              </a:spcAft>
+              <a:buNone/>
+            </a:pPr>
+            <a:r>
+              <a:rPr b="1" i="0" lang="mn-MN" sz="2799" u="none" cap="none" strike="noStrike">
+                <a:solidFill>
+                  <a:srgbClr val="3F6100"/>
+                </a:solidFill>
+                <a:latin typeface="Arial"/>
+                <a:ea typeface="Arial"/>
+                <a:cs typeface="Arial"/>
+                <a:sym typeface="Arial"/>
+              </a:rPr>
+              <a:t>2-р хэсэг</a:t>
+            </a:r>
+            <a:endParaRPr/>
+          </a:p>
+        </p:txBody>
+      </p:sp>
+      <p:sp>
+        <p:nvSpPr>
+          <p:cNvPr id="278" name="Google Shape;278;p18"/>
+          <p:cNvSpPr txBox="1"/>
+          <p:nvPr/>
+        </p:nvSpPr>
+        <p:spPr>
+          <a:xfrm>
+            <a:off x="1028700" y="3623916"/>
+            <a:ext cx="4554191" cy="538480"/>
+          </a:xfrm>
+          <a:prstGeom prst="rect">
+            <a:avLst/>
+          </a:prstGeom>
+          <a:noFill/>
+          <a:ln>
+            <a:noFill/>
+          </a:ln>
+        </p:spPr>
+        <p:txBody>
+          <a:bodyPr anchorCtr="0" anchor="t" bIns="0" lIns="0" spcFirstLastPara="1" rIns="0" wrap="square" tIns="0">
+            <a:spAutoFit/>
+          </a:bodyPr>
+          <a:lstStyle/>
+          <a:p>
+            <a:pPr indent="0" lvl="0" marL="0" marR="0" rtl="0" algn="l">
+              <a:lnSpc>
+                <a:spcPct val="140014"/>
+              </a:lnSpc>
+              <a:spcBef>
+                <a:spcPts val="0"/>
+              </a:spcBef>
+              <a:spcAft>
+                <a:spcPts val="0"/>
+              </a:spcAft>
+              <a:buNone/>
+            </a:pPr>
+            <a:r>
+              <a:rPr b="1" i="0" lang="mn-MN" sz="2799" u="none" cap="none" strike="noStrike">
+                <a:solidFill>
+                  <a:srgbClr val="3F6100"/>
+                </a:solidFill>
+                <a:latin typeface="Arial"/>
+                <a:ea typeface="Arial"/>
+                <a:cs typeface="Arial"/>
+                <a:sym typeface="Arial"/>
+              </a:rPr>
+              <a:t>2-р хэсэг</a:t>
+            </a:r>
+            <a:endParaRPr/>
+          </a:p>
+        </p:txBody>
+      </p:sp>
+      <p:sp>
+        <p:nvSpPr>
+          <p:cNvPr id="279" name="Google Shape;279;p18"/>
+          <p:cNvSpPr txBox="1"/>
+          <p:nvPr/>
+        </p:nvSpPr>
+        <p:spPr>
+          <a:xfrm>
+            <a:off x="1028700" y="4075502"/>
+            <a:ext cx="4554191" cy="538480"/>
+          </a:xfrm>
+          <a:prstGeom prst="rect">
+            <a:avLst/>
+          </a:prstGeom>
+          <a:noFill/>
+          <a:ln>
+            <a:noFill/>
+          </a:ln>
+        </p:spPr>
+        <p:txBody>
+          <a:bodyPr anchorCtr="0" anchor="t" bIns="0" lIns="0" spcFirstLastPara="1" rIns="0" wrap="square" tIns="0">
+            <a:spAutoFit/>
+          </a:bodyPr>
+          <a:lstStyle/>
+          <a:p>
+            <a:pPr indent="0" lvl="0" marL="0" marR="0" rtl="0" algn="l">
+              <a:lnSpc>
+                <a:spcPct val="140014"/>
+              </a:lnSpc>
+              <a:spcBef>
+                <a:spcPts val="0"/>
+              </a:spcBef>
+              <a:spcAft>
+                <a:spcPts val="0"/>
+              </a:spcAft>
+              <a:buNone/>
+            </a:pPr>
+            <a:r>
+              <a:rPr b="1" i="0" lang="mn-MN" sz="2799" u="none" cap="none" strike="noStrike">
+                <a:solidFill>
+                  <a:srgbClr val="3F6100"/>
+                </a:solidFill>
+                <a:latin typeface="Arial"/>
+                <a:ea typeface="Arial"/>
+                <a:cs typeface="Arial"/>
+                <a:sym typeface="Arial"/>
+              </a:rPr>
+              <a:t>2-р хэсэг</a:t>
+            </a:r>
+            <a:endParaRPr/>
+          </a:p>
+        </p:txBody>
+      </p:sp>
+      <p:sp>
+        <p:nvSpPr>
+          <p:cNvPr id="280" name="Google Shape;280;p18"/>
+          <p:cNvSpPr txBox="1"/>
+          <p:nvPr/>
+        </p:nvSpPr>
+        <p:spPr>
+          <a:xfrm>
+            <a:off x="1028700" y="4527089"/>
+            <a:ext cx="4554191" cy="538480"/>
+          </a:xfrm>
+          <a:prstGeom prst="rect">
+            <a:avLst/>
+          </a:prstGeom>
+          <a:noFill/>
+          <a:ln>
+            <a:noFill/>
+          </a:ln>
+        </p:spPr>
+        <p:txBody>
+          <a:bodyPr anchorCtr="0" anchor="t" bIns="0" lIns="0" spcFirstLastPara="1" rIns="0" wrap="square" tIns="0">
+            <a:spAutoFit/>
+          </a:bodyPr>
+          <a:lstStyle/>
+          <a:p>
+            <a:pPr indent="0" lvl="0" marL="0" marR="0" rtl="0" algn="l">
+              <a:lnSpc>
+                <a:spcPct val="140014"/>
+              </a:lnSpc>
+              <a:spcBef>
+                <a:spcPts val="0"/>
+              </a:spcBef>
+              <a:spcAft>
+                <a:spcPts val="0"/>
+              </a:spcAft>
+              <a:buNone/>
+            </a:pPr>
+            <a:r>
+              <a:rPr b="1" i="0" lang="mn-MN" sz="2799" u="none" cap="none" strike="noStrike">
+                <a:solidFill>
+                  <a:srgbClr val="3F6100"/>
+                </a:solidFill>
+                <a:latin typeface="Arial"/>
+                <a:ea typeface="Arial"/>
+                <a:cs typeface="Arial"/>
+                <a:sym typeface="Arial"/>
+              </a:rPr>
+              <a:t>2-р хэсэг</a:t>
+            </a:r>
+            <a:endParaRPr/>
+          </a:p>
+        </p:txBody>
+      </p:sp>
+      <p:sp>
+        <p:nvSpPr>
+          <p:cNvPr id="281" name="Google Shape;281;p18"/>
+          <p:cNvSpPr txBox="1"/>
+          <p:nvPr/>
+        </p:nvSpPr>
+        <p:spPr>
+          <a:xfrm>
+            <a:off x="1028700" y="4978675"/>
+            <a:ext cx="4554191" cy="538480"/>
+          </a:xfrm>
+          <a:prstGeom prst="rect">
+            <a:avLst/>
+          </a:prstGeom>
+          <a:noFill/>
+          <a:ln>
+            <a:noFill/>
+          </a:ln>
+        </p:spPr>
+        <p:txBody>
+          <a:bodyPr anchorCtr="0" anchor="t" bIns="0" lIns="0" spcFirstLastPara="1" rIns="0" wrap="square" tIns="0">
+            <a:spAutoFit/>
+          </a:bodyPr>
+          <a:lstStyle/>
+          <a:p>
+            <a:pPr indent="0" lvl="0" marL="0" marR="0" rtl="0" algn="l">
+              <a:lnSpc>
+                <a:spcPct val="140014"/>
+              </a:lnSpc>
+              <a:spcBef>
+                <a:spcPts val="0"/>
+              </a:spcBef>
+              <a:spcAft>
+                <a:spcPts val="0"/>
+              </a:spcAft>
+              <a:buNone/>
+            </a:pPr>
+            <a:r>
+              <a:rPr b="1" i="0" lang="mn-MN" sz="2799" u="none" cap="none" strike="noStrike">
+                <a:solidFill>
+                  <a:srgbClr val="3F6100"/>
+                </a:solidFill>
+                <a:latin typeface="Arial"/>
+                <a:ea typeface="Arial"/>
+                <a:cs typeface="Arial"/>
+                <a:sym typeface="Arial"/>
+              </a:rPr>
+              <a:t>2-р хэсэг</a:t>
+            </a:r>
+            <a:endParaRPr/>
+          </a:p>
+        </p:txBody>
+      </p:sp>
+      <p:sp>
+        <p:nvSpPr>
+          <p:cNvPr id="282" name="Google Shape;282;p18"/>
+          <p:cNvSpPr txBox="1"/>
+          <p:nvPr/>
+        </p:nvSpPr>
+        <p:spPr>
+          <a:xfrm>
+            <a:off x="1028700" y="5430261"/>
+            <a:ext cx="4554191" cy="538480"/>
+          </a:xfrm>
+          <a:prstGeom prst="rect">
+            <a:avLst/>
+          </a:prstGeom>
+          <a:noFill/>
+          <a:ln>
+            <a:noFill/>
+          </a:ln>
+        </p:spPr>
+        <p:txBody>
+          <a:bodyPr anchorCtr="0" anchor="t" bIns="0" lIns="0" spcFirstLastPara="1" rIns="0" wrap="square" tIns="0">
+            <a:spAutoFit/>
+          </a:bodyPr>
+          <a:lstStyle/>
+          <a:p>
+            <a:pPr indent="0" lvl="0" marL="0" marR="0" rtl="0" algn="l">
+              <a:lnSpc>
+                <a:spcPct val="140014"/>
+              </a:lnSpc>
+              <a:spcBef>
+                <a:spcPts val="0"/>
+              </a:spcBef>
+              <a:spcAft>
+                <a:spcPts val="0"/>
+              </a:spcAft>
+              <a:buNone/>
+            </a:pPr>
+            <a:r>
+              <a:rPr b="1" i="0" lang="mn-MN" sz="2799" u="none" cap="none" strike="noStrike">
+                <a:solidFill>
+                  <a:srgbClr val="3F6100"/>
+                </a:solidFill>
+                <a:latin typeface="Arial"/>
+                <a:ea typeface="Arial"/>
+                <a:cs typeface="Arial"/>
+                <a:sym typeface="Arial"/>
+              </a:rPr>
+              <a:t>2-р хэсэг</a:t>
+            </a:r>
+            <a:endParaRPr/>
+          </a:p>
+        </p:txBody>
+      </p:sp>
+      <p:sp>
+        <p:nvSpPr>
+          <p:cNvPr id="283" name="Google Shape;283;p18"/>
+          <p:cNvSpPr txBox="1"/>
+          <p:nvPr/>
+        </p:nvSpPr>
+        <p:spPr>
+          <a:xfrm>
+            <a:off x="1028700" y="5881847"/>
+            <a:ext cx="4554191" cy="538480"/>
+          </a:xfrm>
+          <a:prstGeom prst="rect">
+            <a:avLst/>
+          </a:prstGeom>
+          <a:noFill/>
+          <a:ln>
+            <a:noFill/>
+          </a:ln>
+        </p:spPr>
+        <p:txBody>
+          <a:bodyPr anchorCtr="0" anchor="t" bIns="0" lIns="0" spcFirstLastPara="1" rIns="0" wrap="square" tIns="0">
+            <a:spAutoFit/>
+          </a:bodyPr>
+          <a:lstStyle/>
+          <a:p>
+            <a:pPr indent="0" lvl="0" marL="0" marR="0" rtl="0" algn="l">
+              <a:lnSpc>
+                <a:spcPct val="140014"/>
+              </a:lnSpc>
+              <a:spcBef>
+                <a:spcPts val="0"/>
+              </a:spcBef>
+              <a:spcAft>
+                <a:spcPts val="0"/>
+              </a:spcAft>
+              <a:buNone/>
+            </a:pPr>
+            <a:r>
+              <a:rPr b="1" i="0" lang="mn-MN" sz="2799" u="none" cap="none" strike="noStrike">
+                <a:solidFill>
+                  <a:srgbClr val="3F6100"/>
+                </a:solidFill>
+                <a:latin typeface="Arial"/>
+                <a:ea typeface="Arial"/>
+                <a:cs typeface="Arial"/>
+                <a:sym typeface="Arial"/>
+              </a:rPr>
+              <a:t>2-р хэсэг</a:t>
+            </a:r>
+            <a:endParaRPr/>
+          </a:p>
+        </p:txBody>
+      </p:sp>
+      <p:sp>
+        <p:nvSpPr>
+          <p:cNvPr id="284" name="Google Shape;284;p18"/>
+          <p:cNvSpPr txBox="1"/>
+          <p:nvPr/>
+        </p:nvSpPr>
+        <p:spPr>
+          <a:xfrm>
+            <a:off x="1028700" y="6333433"/>
+            <a:ext cx="4554191" cy="538480"/>
+          </a:xfrm>
+          <a:prstGeom prst="rect">
+            <a:avLst/>
+          </a:prstGeom>
+          <a:noFill/>
+          <a:ln>
+            <a:noFill/>
+          </a:ln>
+        </p:spPr>
+        <p:txBody>
+          <a:bodyPr anchorCtr="0" anchor="t" bIns="0" lIns="0" spcFirstLastPara="1" rIns="0" wrap="square" tIns="0">
+            <a:spAutoFit/>
+          </a:bodyPr>
+          <a:lstStyle/>
+          <a:p>
+            <a:pPr indent="0" lvl="0" marL="0" marR="0" rtl="0" algn="l">
+              <a:lnSpc>
+                <a:spcPct val="140014"/>
+              </a:lnSpc>
+              <a:spcBef>
+                <a:spcPts val="0"/>
+              </a:spcBef>
+              <a:spcAft>
+                <a:spcPts val="0"/>
+              </a:spcAft>
+              <a:buNone/>
+            </a:pPr>
+            <a:r>
+              <a:rPr b="1" i="0" lang="mn-MN" sz="2799" u="none" cap="none" strike="noStrike">
+                <a:solidFill>
+                  <a:srgbClr val="3F6100"/>
+                </a:solidFill>
+                <a:latin typeface="Arial"/>
+                <a:ea typeface="Arial"/>
+                <a:cs typeface="Arial"/>
+                <a:sym typeface="Arial"/>
+              </a:rPr>
+              <a:t>2-р хэсэг</a:t>
+            </a:r>
+            <a:endParaRPr/>
+          </a:p>
+        </p:txBody>
+      </p:sp>
+      <p:sp>
+        <p:nvSpPr>
+          <p:cNvPr id="285" name="Google Shape;285;p18"/>
+          <p:cNvSpPr txBox="1"/>
+          <p:nvPr/>
+        </p:nvSpPr>
+        <p:spPr>
+          <a:xfrm>
+            <a:off x="1028700" y="6785019"/>
+            <a:ext cx="4554191" cy="538480"/>
+          </a:xfrm>
+          <a:prstGeom prst="rect">
+            <a:avLst/>
+          </a:prstGeom>
+          <a:noFill/>
+          <a:ln>
+            <a:noFill/>
+          </a:ln>
+        </p:spPr>
+        <p:txBody>
+          <a:bodyPr anchorCtr="0" anchor="t" bIns="0" lIns="0" spcFirstLastPara="1" rIns="0" wrap="square" tIns="0">
+            <a:spAutoFit/>
+          </a:bodyPr>
+          <a:lstStyle/>
+          <a:p>
+            <a:pPr indent="0" lvl="0" marL="0" marR="0" rtl="0" algn="l">
+              <a:lnSpc>
+                <a:spcPct val="140014"/>
+              </a:lnSpc>
+              <a:spcBef>
+                <a:spcPts val="0"/>
+              </a:spcBef>
+              <a:spcAft>
+                <a:spcPts val="0"/>
+              </a:spcAft>
+              <a:buNone/>
+            </a:pPr>
+            <a:r>
+              <a:rPr b="1" i="0" lang="mn-MN" sz="2799" u="none" cap="none" strike="noStrike">
+                <a:solidFill>
+                  <a:srgbClr val="3F6100"/>
+                </a:solidFill>
+                <a:latin typeface="Arial"/>
+                <a:ea typeface="Arial"/>
+                <a:cs typeface="Arial"/>
+                <a:sym typeface="Arial"/>
+              </a:rPr>
+              <a:t>2-р хэсэг</a:t>
+            </a:r>
+            <a:endParaRPr/>
+          </a:p>
+        </p:txBody>
+      </p:sp>
+      <p:sp>
+        <p:nvSpPr>
+          <p:cNvPr id="286" name="Google Shape;286;p18"/>
+          <p:cNvSpPr txBox="1"/>
+          <p:nvPr/>
+        </p:nvSpPr>
+        <p:spPr>
+          <a:xfrm>
+            <a:off x="1028700" y="7236605"/>
+            <a:ext cx="4554191" cy="538480"/>
+          </a:xfrm>
+          <a:prstGeom prst="rect">
+            <a:avLst/>
+          </a:prstGeom>
+          <a:noFill/>
+          <a:ln>
+            <a:noFill/>
+          </a:ln>
+        </p:spPr>
+        <p:txBody>
+          <a:bodyPr anchorCtr="0" anchor="t" bIns="0" lIns="0" spcFirstLastPara="1" rIns="0" wrap="square" tIns="0">
+            <a:spAutoFit/>
+          </a:bodyPr>
+          <a:lstStyle/>
+          <a:p>
+            <a:pPr indent="0" lvl="0" marL="0" marR="0" rtl="0" algn="l">
+              <a:lnSpc>
+                <a:spcPct val="140014"/>
+              </a:lnSpc>
+              <a:spcBef>
+                <a:spcPts val="0"/>
+              </a:spcBef>
+              <a:spcAft>
+                <a:spcPts val="0"/>
+              </a:spcAft>
+              <a:buNone/>
+            </a:pPr>
+            <a:r>
+              <a:rPr b="1" i="0" lang="mn-MN" sz="2799" u="none" cap="none" strike="noStrike">
+                <a:solidFill>
+                  <a:srgbClr val="3F6100"/>
+                </a:solidFill>
+                <a:latin typeface="Arial"/>
+                <a:ea typeface="Arial"/>
+                <a:cs typeface="Arial"/>
+                <a:sym typeface="Arial"/>
+              </a:rPr>
+              <a:t>2-р хэсэг</a:t>
+            </a:r>
+            <a:endParaRPr/>
+          </a:p>
+        </p:txBody>
+      </p:sp>
+      <p:sp>
+        <p:nvSpPr>
+          <p:cNvPr id="287" name="Google Shape;287;p18"/>
+          <p:cNvSpPr txBox="1"/>
+          <p:nvPr/>
+        </p:nvSpPr>
+        <p:spPr>
+          <a:xfrm>
+            <a:off x="15421719" y="5190765"/>
+            <a:ext cx="1837581" cy="538480"/>
+          </a:xfrm>
+          <a:prstGeom prst="rect">
+            <a:avLst/>
+          </a:prstGeom>
+          <a:noFill/>
+          <a:ln>
+            <a:noFill/>
+          </a:ln>
+        </p:spPr>
+        <p:txBody>
+          <a:bodyPr anchorCtr="0" anchor="t" bIns="0" lIns="0" spcFirstLastPara="1" rIns="0" wrap="square" tIns="0">
+            <a:spAutoFit/>
+          </a:bodyPr>
+          <a:lstStyle/>
+          <a:p>
+            <a:pPr indent="0" lvl="0" marL="0" marR="0" rtl="0" algn="r">
+              <a:lnSpc>
+                <a:spcPct val="140014"/>
+              </a:lnSpc>
+              <a:spcBef>
+                <a:spcPts val="0"/>
+              </a:spcBef>
+              <a:spcAft>
+                <a:spcPts val="0"/>
+              </a:spcAft>
+              <a:buNone/>
+            </a:pPr>
+            <a:r>
+              <a:rPr b="1" i="0" lang="mn-MN" sz="2799" u="none" cap="none" strike="noStrike">
+                <a:solidFill>
+                  <a:srgbClr val="3F6100"/>
+                </a:solidFill>
+                <a:latin typeface="Arial"/>
+                <a:ea typeface="Arial"/>
+                <a:cs typeface="Arial"/>
+                <a:sym typeface="Arial"/>
+              </a:rPr>
+              <a:t>Graphican</a:t>
+            </a:r>
+            <a:endParaRPr/>
+          </a:p>
+        </p:txBody>
+      </p:sp>
+      <p:sp>
+        <p:nvSpPr>
+          <p:cNvPr id="288" name="Google Shape;288;p18"/>
+          <p:cNvSpPr txBox="1"/>
+          <p:nvPr/>
+        </p:nvSpPr>
+        <p:spPr>
+          <a:xfrm>
+            <a:off x="15421719" y="5614945"/>
+            <a:ext cx="1837581" cy="538480"/>
+          </a:xfrm>
+          <a:prstGeom prst="rect">
+            <a:avLst/>
+          </a:prstGeom>
+          <a:noFill/>
+          <a:ln>
+            <a:noFill/>
+          </a:ln>
+        </p:spPr>
+        <p:txBody>
+          <a:bodyPr anchorCtr="0" anchor="t" bIns="0" lIns="0" spcFirstLastPara="1" rIns="0" wrap="square" tIns="0">
+            <a:spAutoFit/>
+          </a:bodyPr>
+          <a:lstStyle/>
+          <a:p>
+            <a:pPr indent="0" lvl="0" marL="0" marR="0" rtl="0" algn="r">
+              <a:lnSpc>
+                <a:spcPct val="140014"/>
+              </a:lnSpc>
+              <a:spcBef>
+                <a:spcPts val="0"/>
+              </a:spcBef>
+              <a:spcAft>
+                <a:spcPts val="0"/>
+              </a:spcAft>
+              <a:buNone/>
+            </a:pPr>
+            <a:r>
+              <a:rPr b="1" i="0" lang="mn-MN" sz="2799" u="none" cap="none" strike="noStrike">
+                <a:solidFill>
+                  <a:srgbClr val="3F6100"/>
+                </a:solidFill>
+                <a:latin typeface="Arial"/>
+                <a:ea typeface="Arial"/>
+                <a:cs typeface="Arial"/>
+                <a:sym typeface="Arial"/>
+              </a:rPr>
+              <a:t>Graphican</a:t>
+            </a:r>
+            <a:endParaRPr/>
+          </a:p>
+        </p:txBody>
+      </p:sp>
+      <p:sp>
+        <p:nvSpPr>
+          <p:cNvPr id="289" name="Google Shape;289;p18"/>
+          <p:cNvSpPr txBox="1"/>
+          <p:nvPr/>
+        </p:nvSpPr>
+        <p:spPr>
+          <a:xfrm>
+            <a:off x="15421719" y="6039125"/>
+            <a:ext cx="1837581" cy="538480"/>
+          </a:xfrm>
+          <a:prstGeom prst="rect">
+            <a:avLst/>
+          </a:prstGeom>
+          <a:noFill/>
+          <a:ln>
+            <a:noFill/>
+          </a:ln>
+        </p:spPr>
+        <p:txBody>
+          <a:bodyPr anchorCtr="0" anchor="t" bIns="0" lIns="0" spcFirstLastPara="1" rIns="0" wrap="square" tIns="0">
+            <a:spAutoFit/>
+          </a:bodyPr>
+          <a:lstStyle/>
+          <a:p>
+            <a:pPr indent="0" lvl="0" marL="0" marR="0" rtl="0" algn="r">
+              <a:lnSpc>
+                <a:spcPct val="140014"/>
+              </a:lnSpc>
+              <a:spcBef>
+                <a:spcPts val="0"/>
+              </a:spcBef>
+              <a:spcAft>
+                <a:spcPts val="0"/>
+              </a:spcAft>
+              <a:buNone/>
+            </a:pPr>
+            <a:r>
+              <a:rPr b="1" i="0" lang="mn-MN" sz="2799" u="none" cap="none" strike="noStrike">
+                <a:solidFill>
+                  <a:srgbClr val="3F6100"/>
+                </a:solidFill>
+                <a:latin typeface="Arial"/>
+                <a:ea typeface="Arial"/>
+                <a:cs typeface="Arial"/>
+                <a:sym typeface="Arial"/>
+              </a:rPr>
+              <a:t>Graphican</a:t>
+            </a:r>
+            <a:endParaRPr/>
+          </a:p>
+        </p:txBody>
+      </p:sp>
+      <p:sp>
+        <p:nvSpPr>
+          <p:cNvPr id="290" name="Google Shape;290;p18"/>
+          <p:cNvSpPr txBox="1"/>
+          <p:nvPr/>
+        </p:nvSpPr>
+        <p:spPr>
+          <a:xfrm>
+            <a:off x="15421719" y="6463305"/>
+            <a:ext cx="1837581" cy="538480"/>
+          </a:xfrm>
+          <a:prstGeom prst="rect">
+            <a:avLst/>
+          </a:prstGeom>
+          <a:noFill/>
+          <a:ln>
+            <a:noFill/>
+          </a:ln>
+        </p:spPr>
+        <p:txBody>
+          <a:bodyPr anchorCtr="0" anchor="t" bIns="0" lIns="0" spcFirstLastPara="1" rIns="0" wrap="square" tIns="0">
+            <a:spAutoFit/>
+          </a:bodyPr>
+          <a:lstStyle/>
+          <a:p>
+            <a:pPr indent="0" lvl="0" marL="0" marR="0" rtl="0" algn="r">
+              <a:lnSpc>
+                <a:spcPct val="140014"/>
+              </a:lnSpc>
+              <a:spcBef>
+                <a:spcPts val="0"/>
+              </a:spcBef>
+              <a:spcAft>
+                <a:spcPts val="0"/>
+              </a:spcAft>
+              <a:buNone/>
+            </a:pPr>
+            <a:r>
+              <a:rPr b="1" i="0" lang="mn-MN" sz="2799" u="none" cap="none" strike="noStrike">
+                <a:solidFill>
+                  <a:srgbClr val="3F6100"/>
+                </a:solidFill>
+                <a:latin typeface="Arial"/>
+                <a:ea typeface="Arial"/>
+                <a:cs typeface="Arial"/>
+                <a:sym typeface="Arial"/>
+              </a:rPr>
+              <a:t>Graphican</a:t>
+            </a:r>
+            <a:endParaRPr/>
+          </a:p>
+        </p:txBody>
+      </p:sp>
+      <p:sp>
+        <p:nvSpPr>
+          <p:cNvPr id="291" name="Google Shape;291;p18"/>
+          <p:cNvSpPr txBox="1"/>
+          <p:nvPr/>
+        </p:nvSpPr>
+        <p:spPr>
+          <a:xfrm>
+            <a:off x="15421719" y="6887485"/>
+            <a:ext cx="1837581" cy="538480"/>
+          </a:xfrm>
+          <a:prstGeom prst="rect">
+            <a:avLst/>
+          </a:prstGeom>
+          <a:noFill/>
+          <a:ln>
+            <a:noFill/>
+          </a:ln>
+        </p:spPr>
+        <p:txBody>
+          <a:bodyPr anchorCtr="0" anchor="t" bIns="0" lIns="0" spcFirstLastPara="1" rIns="0" wrap="square" tIns="0">
+            <a:spAutoFit/>
+          </a:bodyPr>
+          <a:lstStyle/>
+          <a:p>
+            <a:pPr indent="0" lvl="0" marL="0" marR="0" rtl="0" algn="r">
+              <a:lnSpc>
+                <a:spcPct val="140014"/>
+              </a:lnSpc>
+              <a:spcBef>
+                <a:spcPts val="0"/>
+              </a:spcBef>
+              <a:spcAft>
+                <a:spcPts val="0"/>
+              </a:spcAft>
+              <a:buNone/>
+            </a:pPr>
+            <a:r>
+              <a:rPr b="1" i="0" lang="mn-MN" sz="2799" u="none" cap="none" strike="noStrike">
+                <a:solidFill>
+                  <a:srgbClr val="3F6100"/>
+                </a:solidFill>
+                <a:latin typeface="Arial"/>
+                <a:ea typeface="Arial"/>
+                <a:cs typeface="Arial"/>
+                <a:sym typeface="Arial"/>
+              </a:rPr>
+              <a:t>Graphican</a:t>
+            </a:r>
+            <a:endParaRPr/>
+          </a:p>
+        </p:txBody>
+      </p:sp>
+      <p:sp>
+        <p:nvSpPr>
+          <p:cNvPr id="292" name="Google Shape;292;p18"/>
+          <p:cNvSpPr txBox="1"/>
+          <p:nvPr/>
+        </p:nvSpPr>
+        <p:spPr>
+          <a:xfrm>
+            <a:off x="15421719" y="7311665"/>
+            <a:ext cx="1837581" cy="538480"/>
+          </a:xfrm>
+          <a:prstGeom prst="rect">
+            <a:avLst/>
+          </a:prstGeom>
+          <a:noFill/>
+          <a:ln>
+            <a:noFill/>
+          </a:ln>
+        </p:spPr>
+        <p:txBody>
+          <a:bodyPr anchorCtr="0" anchor="t" bIns="0" lIns="0" spcFirstLastPara="1" rIns="0" wrap="square" tIns="0">
+            <a:spAutoFit/>
+          </a:bodyPr>
+          <a:lstStyle/>
+          <a:p>
+            <a:pPr indent="0" lvl="0" marL="0" marR="0" rtl="0" algn="r">
+              <a:lnSpc>
+                <a:spcPct val="140014"/>
+              </a:lnSpc>
+              <a:spcBef>
+                <a:spcPts val="0"/>
+              </a:spcBef>
+              <a:spcAft>
+                <a:spcPts val="0"/>
+              </a:spcAft>
+              <a:buNone/>
+            </a:pPr>
+            <a:r>
+              <a:rPr b="1" i="0" lang="mn-MN" sz="2799" u="none" cap="none" strike="noStrike">
+                <a:solidFill>
+                  <a:srgbClr val="3F6100"/>
+                </a:solidFill>
+                <a:latin typeface="Arial"/>
+                <a:ea typeface="Arial"/>
+                <a:cs typeface="Arial"/>
+                <a:sym typeface="Arial"/>
+              </a:rPr>
+              <a:t>Graphican</a:t>
+            </a:r>
+            <a:endParaRPr/>
+          </a:p>
+        </p:txBody>
+      </p:sp>
+      <p:sp>
+        <p:nvSpPr>
+          <p:cNvPr id="293" name="Google Shape;293;p18"/>
+          <p:cNvSpPr txBox="1"/>
+          <p:nvPr/>
+        </p:nvSpPr>
+        <p:spPr>
+          <a:xfrm>
+            <a:off x="15421719" y="7735845"/>
+            <a:ext cx="1837581" cy="538480"/>
+          </a:xfrm>
+          <a:prstGeom prst="rect">
+            <a:avLst/>
+          </a:prstGeom>
+          <a:noFill/>
+          <a:ln>
+            <a:noFill/>
+          </a:ln>
+        </p:spPr>
+        <p:txBody>
+          <a:bodyPr anchorCtr="0" anchor="t" bIns="0" lIns="0" spcFirstLastPara="1" rIns="0" wrap="square" tIns="0">
+            <a:spAutoFit/>
+          </a:bodyPr>
+          <a:lstStyle/>
+          <a:p>
+            <a:pPr indent="0" lvl="0" marL="0" marR="0" rtl="0" algn="r">
+              <a:lnSpc>
+                <a:spcPct val="140014"/>
+              </a:lnSpc>
+              <a:spcBef>
+                <a:spcPts val="0"/>
+              </a:spcBef>
+              <a:spcAft>
+                <a:spcPts val="0"/>
+              </a:spcAft>
+              <a:buNone/>
+            </a:pPr>
+            <a:r>
+              <a:rPr b="1" i="0" lang="mn-MN" sz="2799" u="none" cap="none" strike="noStrike">
+                <a:solidFill>
+                  <a:srgbClr val="3F6100"/>
+                </a:solidFill>
+                <a:latin typeface="Arial"/>
+                <a:ea typeface="Arial"/>
+                <a:cs typeface="Arial"/>
+                <a:sym typeface="Arial"/>
+              </a:rPr>
+              <a:t>Graphican</a:t>
+            </a:r>
+            <a:endParaRPr/>
+          </a:p>
+        </p:txBody>
+      </p:sp>
+      <p:sp>
+        <p:nvSpPr>
+          <p:cNvPr id="294" name="Google Shape;294;p18"/>
+          <p:cNvSpPr txBox="1"/>
+          <p:nvPr/>
+        </p:nvSpPr>
+        <p:spPr>
+          <a:xfrm>
+            <a:off x="15421719" y="8160025"/>
+            <a:ext cx="1837581" cy="538480"/>
+          </a:xfrm>
+          <a:prstGeom prst="rect">
+            <a:avLst/>
+          </a:prstGeom>
+          <a:noFill/>
+          <a:ln>
+            <a:noFill/>
+          </a:ln>
+        </p:spPr>
+        <p:txBody>
+          <a:bodyPr anchorCtr="0" anchor="t" bIns="0" lIns="0" spcFirstLastPara="1" rIns="0" wrap="square" tIns="0">
+            <a:spAutoFit/>
+          </a:bodyPr>
+          <a:lstStyle/>
+          <a:p>
+            <a:pPr indent="0" lvl="0" marL="0" marR="0" rtl="0" algn="r">
+              <a:lnSpc>
+                <a:spcPct val="140014"/>
+              </a:lnSpc>
+              <a:spcBef>
+                <a:spcPts val="0"/>
+              </a:spcBef>
+              <a:spcAft>
+                <a:spcPts val="0"/>
+              </a:spcAft>
+              <a:buNone/>
+            </a:pPr>
+            <a:r>
+              <a:rPr b="1" i="0" lang="mn-MN" sz="2799" u="none" cap="none" strike="noStrike">
+                <a:solidFill>
+                  <a:srgbClr val="3F6100"/>
+                </a:solidFill>
+                <a:latin typeface="Arial"/>
+                <a:ea typeface="Arial"/>
+                <a:cs typeface="Arial"/>
+                <a:sym typeface="Arial"/>
+              </a:rPr>
+              <a:t>Graphican</a:t>
+            </a:r>
+            <a:endParaRPr/>
+          </a:p>
+        </p:txBody>
+      </p:sp>
+      <p:sp>
+        <p:nvSpPr>
+          <p:cNvPr id="295" name="Google Shape;295;p18"/>
+          <p:cNvSpPr txBox="1"/>
+          <p:nvPr/>
+        </p:nvSpPr>
+        <p:spPr>
+          <a:xfrm>
+            <a:off x="15421719" y="8584205"/>
+            <a:ext cx="1837581" cy="538480"/>
+          </a:xfrm>
+          <a:prstGeom prst="rect">
+            <a:avLst/>
+          </a:prstGeom>
+          <a:noFill/>
+          <a:ln>
+            <a:noFill/>
+          </a:ln>
+        </p:spPr>
+        <p:txBody>
+          <a:bodyPr anchorCtr="0" anchor="t" bIns="0" lIns="0" spcFirstLastPara="1" rIns="0" wrap="square" tIns="0">
+            <a:spAutoFit/>
+          </a:bodyPr>
+          <a:lstStyle/>
+          <a:p>
+            <a:pPr indent="0" lvl="0" marL="0" marR="0" rtl="0" algn="r">
+              <a:lnSpc>
+                <a:spcPct val="140014"/>
+              </a:lnSpc>
+              <a:spcBef>
+                <a:spcPts val="0"/>
+              </a:spcBef>
+              <a:spcAft>
+                <a:spcPts val="0"/>
+              </a:spcAft>
+              <a:buNone/>
+            </a:pPr>
+            <a:r>
+              <a:rPr b="1" i="0" lang="mn-MN" sz="2799" u="none" cap="none" strike="noStrike">
+                <a:solidFill>
+                  <a:srgbClr val="3F6100"/>
+                </a:solidFill>
+                <a:latin typeface="Arial"/>
+                <a:ea typeface="Arial"/>
+                <a:cs typeface="Arial"/>
+                <a:sym typeface="Arial"/>
+              </a:rPr>
+              <a:t>Graphican</a:t>
+            </a:r>
+            <a:endParaRPr/>
+          </a:p>
+        </p:txBody>
+      </p:sp>
+      <p:sp>
+        <p:nvSpPr>
+          <p:cNvPr id="296" name="Google Shape;296;p18"/>
+          <p:cNvSpPr txBox="1"/>
+          <p:nvPr/>
+        </p:nvSpPr>
+        <p:spPr>
+          <a:xfrm>
+            <a:off x="15421719" y="9008385"/>
+            <a:ext cx="1837581" cy="538480"/>
+          </a:xfrm>
+          <a:prstGeom prst="rect">
+            <a:avLst/>
+          </a:prstGeom>
+          <a:noFill/>
+          <a:ln>
+            <a:noFill/>
+          </a:ln>
+        </p:spPr>
+        <p:txBody>
+          <a:bodyPr anchorCtr="0" anchor="t" bIns="0" lIns="0" spcFirstLastPara="1" rIns="0" wrap="square" tIns="0">
+            <a:spAutoFit/>
+          </a:bodyPr>
+          <a:lstStyle/>
+          <a:p>
+            <a:pPr indent="0" lvl="0" marL="0" marR="0" rtl="0" algn="r">
+              <a:lnSpc>
+                <a:spcPct val="140014"/>
+              </a:lnSpc>
+              <a:spcBef>
+                <a:spcPts val="0"/>
+              </a:spcBef>
+              <a:spcAft>
+                <a:spcPts val="0"/>
+              </a:spcAft>
+              <a:buNone/>
+            </a:pPr>
+            <a:r>
+              <a:rPr b="1" i="0" lang="mn-MN" sz="2799" u="none" cap="none" strike="noStrike">
+                <a:solidFill>
+                  <a:srgbClr val="3F6100"/>
+                </a:solidFill>
+                <a:latin typeface="Arial"/>
+                <a:ea typeface="Arial"/>
+                <a:cs typeface="Arial"/>
+                <a:sym typeface="Arial"/>
+              </a:rPr>
+              <a:t>Graphican</a:t>
+            </a:r>
+            <a:endParaRPr/>
+          </a:p>
+        </p:txBody>
+      </p:sp>
+      <p:sp>
+        <p:nvSpPr>
+          <p:cNvPr id="297" name="Google Shape;297;p18"/>
+          <p:cNvSpPr txBox="1"/>
+          <p:nvPr/>
+        </p:nvSpPr>
+        <p:spPr>
+          <a:xfrm>
+            <a:off x="1028700" y="7689360"/>
+            <a:ext cx="4554191" cy="538480"/>
+          </a:xfrm>
+          <a:prstGeom prst="rect">
+            <a:avLst/>
+          </a:prstGeom>
+          <a:noFill/>
+          <a:ln>
+            <a:noFill/>
+          </a:ln>
+        </p:spPr>
+        <p:txBody>
+          <a:bodyPr anchorCtr="0" anchor="t" bIns="0" lIns="0" spcFirstLastPara="1" rIns="0" wrap="square" tIns="0">
+            <a:spAutoFit/>
+          </a:bodyPr>
+          <a:lstStyle/>
+          <a:p>
+            <a:pPr indent="0" lvl="0" marL="0" marR="0" rtl="0" algn="l">
+              <a:lnSpc>
+                <a:spcPct val="140014"/>
+              </a:lnSpc>
+              <a:spcBef>
+                <a:spcPts val="0"/>
+              </a:spcBef>
+              <a:spcAft>
+                <a:spcPts val="0"/>
+              </a:spcAft>
+              <a:buNone/>
+            </a:pPr>
+            <a:r>
+              <a:rPr b="1" i="0" lang="mn-MN" sz="2799" u="none" cap="none" strike="noStrike">
+                <a:solidFill>
+                  <a:srgbClr val="3F6100"/>
+                </a:solidFill>
+                <a:latin typeface="Arial"/>
+                <a:ea typeface="Arial"/>
+                <a:cs typeface="Arial"/>
+                <a:sym typeface="Arial"/>
+              </a:rPr>
+              <a:t>2-р хэсэг</a:t>
+            </a:r>
+            <a:endParaRPr/>
+          </a:p>
+        </p:txBody>
+      </p:sp>
+      <p:sp>
+        <p:nvSpPr>
+          <p:cNvPr id="298" name="Google Shape;298;p18"/>
+          <p:cNvSpPr txBox="1"/>
+          <p:nvPr/>
+        </p:nvSpPr>
+        <p:spPr>
+          <a:xfrm>
+            <a:off x="1028700" y="8140946"/>
+            <a:ext cx="4554191" cy="538480"/>
+          </a:xfrm>
+          <a:prstGeom prst="rect">
+            <a:avLst/>
+          </a:prstGeom>
+          <a:noFill/>
+          <a:ln>
+            <a:noFill/>
+          </a:ln>
+        </p:spPr>
+        <p:txBody>
+          <a:bodyPr anchorCtr="0" anchor="t" bIns="0" lIns="0" spcFirstLastPara="1" rIns="0" wrap="square" tIns="0">
+            <a:spAutoFit/>
+          </a:bodyPr>
+          <a:lstStyle/>
+          <a:p>
+            <a:pPr indent="0" lvl="0" marL="0" marR="0" rtl="0" algn="l">
+              <a:lnSpc>
+                <a:spcPct val="140014"/>
+              </a:lnSpc>
+              <a:spcBef>
+                <a:spcPts val="0"/>
+              </a:spcBef>
+              <a:spcAft>
+                <a:spcPts val="0"/>
+              </a:spcAft>
+              <a:buNone/>
+            </a:pPr>
+            <a:r>
+              <a:rPr b="1" i="0" lang="mn-MN" sz="2799" u="none" cap="none" strike="noStrike">
+                <a:solidFill>
+                  <a:srgbClr val="3F6100"/>
+                </a:solidFill>
+                <a:latin typeface="Arial"/>
+                <a:ea typeface="Arial"/>
+                <a:cs typeface="Arial"/>
+                <a:sym typeface="Arial"/>
+              </a:rPr>
+              <a:t>2-р хэсэг</a:t>
+            </a:r>
+            <a:endParaRPr/>
+          </a:p>
+        </p:txBody>
+      </p:sp>
+      <p:sp>
+        <p:nvSpPr>
+          <p:cNvPr id="299" name="Google Shape;299;p18"/>
+          <p:cNvSpPr txBox="1"/>
+          <p:nvPr/>
+        </p:nvSpPr>
+        <p:spPr>
+          <a:xfrm>
+            <a:off x="1028700" y="8592532"/>
+            <a:ext cx="4554191" cy="538480"/>
+          </a:xfrm>
+          <a:prstGeom prst="rect">
+            <a:avLst/>
+          </a:prstGeom>
+          <a:noFill/>
+          <a:ln>
+            <a:noFill/>
+          </a:ln>
+        </p:spPr>
+        <p:txBody>
+          <a:bodyPr anchorCtr="0" anchor="t" bIns="0" lIns="0" spcFirstLastPara="1" rIns="0" wrap="square" tIns="0">
+            <a:spAutoFit/>
+          </a:bodyPr>
+          <a:lstStyle/>
+          <a:p>
+            <a:pPr indent="0" lvl="0" marL="0" marR="0" rtl="0" algn="l">
+              <a:lnSpc>
+                <a:spcPct val="140014"/>
+              </a:lnSpc>
+              <a:spcBef>
+                <a:spcPts val="0"/>
+              </a:spcBef>
+              <a:spcAft>
+                <a:spcPts val="0"/>
+              </a:spcAft>
+              <a:buNone/>
+            </a:pPr>
+            <a:r>
+              <a:rPr b="1" i="0" lang="mn-MN" sz="2799" u="none" cap="none" strike="noStrike">
+                <a:solidFill>
+                  <a:srgbClr val="3F6100"/>
+                </a:solidFill>
+                <a:latin typeface="Arial"/>
+                <a:ea typeface="Arial"/>
+                <a:cs typeface="Arial"/>
+                <a:sym typeface="Arial"/>
+              </a:rPr>
+              <a:t>2-р хэсэг</a:t>
+            </a:r>
+            <a:endParaRPr/>
+          </a:p>
+        </p:txBody>
+      </p:sp>
+      <p:sp>
+        <p:nvSpPr>
+          <p:cNvPr id="300" name="Google Shape;300;p18"/>
+          <p:cNvSpPr/>
+          <p:nvPr/>
+        </p:nvSpPr>
+        <p:spPr>
+          <a:xfrm>
+            <a:off x="3275388" y="0"/>
+            <a:ext cx="12146331" cy="11193853"/>
+          </a:xfrm>
+          <a:custGeom>
+            <a:rect b="b" l="l" r="r" t="t"/>
+            <a:pathLst>
+              <a:path extrusionOk="0" h="11193853" w="12146331">
+                <a:moveTo>
+                  <a:pt x="12146331" y="0"/>
+                </a:moveTo>
+                <a:lnTo>
+                  <a:pt x="0" y="0"/>
+                </a:lnTo>
+                <a:lnTo>
+                  <a:pt x="0" y="11193853"/>
+                </a:lnTo>
+                <a:lnTo>
+                  <a:pt x="12146331" y="11193853"/>
+                </a:lnTo>
+                <a:lnTo>
+                  <a:pt x="12146331" y="0"/>
+                </a:lnTo>
+                <a:close/>
+              </a:path>
+            </a:pathLst>
+          </a:custGeom>
+          <a:blipFill rotWithShape="1">
+            <a:blip r:embed="rIdSy1">
+              <a:alphaModFix/>
+            </a:blip>
+            <a:srcRect t="24080" b="24080"/>
+            <a:stretch>
+              <a:fillRect b="0" l="-38236" r="0" t="0"/>
+            </a:stretch>
+          </a:blipFill>
+          <a:ln>
+            <a:noFill/>
+          </a:ln>
+        </p:spPr>
+      </p:sp>
+      <p:sp>
+        <p:nvSpPr>
+          <p:cNvPr id="301" name="Google Shape;301;p18"/>
+          <p:cNvSpPr/>
+          <p:nvPr/>
+        </p:nvSpPr>
+        <p:spPr>
+          <a:xfrm>
+            <a:off x="6108236" y="3571600"/>
+            <a:ext cx="6480660" cy="2859349"/>
+          </a:xfrm>
+          <a:prstGeom prst="rect">
+            <a:avLst/>
+          </a:prstGeom>
+        </p:spPr>
+        <p:txBody>
+          <a:bodyPr>
+            <a:prstTxWarp prst="textPlain"/>
+          </a:bodyPr>
+          <a:lstStyle/>
+          <a:p>
+            <a:pPr lvl="0" algn="ctr"/>
+            <a:r>
+              <a:rPr b="0" i="0">
+                <a:ln cap="flat" cmpd="sng" w="76200">
+                  <a:solidFill>
+                    <a:srgbClr val="000000"/>
+                  </a:solidFill>
+                  <a:prstDash val="solid"/>
+                  <a:round/>
+                  <a:headEnd len="sm" w="sm" type="none"/>
+                  <a:tailEnd len="sm" w="sm" type="none"/>
+                </a:ln>
+                <a:solidFill>
+                  <a:srgbClr val="8ACE03"/>
+                </a:solidFill>
+                <a:latin typeface="Arial"/>
+              </a:rPr>
+              <a:t>brat</a:t>
+            </a:r>
+          </a:p>
+        </p:txBody>
+      </p:sp>
+    </p:spTree>
+  </p:cSld>
+  <p:clrMapOvr>
+    <a:masterClrMapping/>
+  </p:clrMapOvr>
+</p:sld>
+</file>
+
 <file path=ppt/slides/slide9.xml><?xml version="1.0" encoding="utf-8"?>
 <p:sld xmlns:a="http://schemas.openxmlformats.org/drawingml/2006/main" xmlns:r="http://schemas.openxmlformats.org/officeDocument/2006/relationships" xmlns:mc="http://schemas.openxmlformats.org/markup-compatibility/2006" xmlns:mv="urn:schemas-microsoft-com:mac:vml" xmlns:p="http://schemas.openxmlformats.org/presentationml/2006/main" xmlns:c="http://schemas.openxmlformats.org/drawingml/2006/chart" xmlns:dgm="http://schemas.openxmlformats.org/drawingml/2006/diagram" xmlns:o="urn:schemas-microsoft-com:office:office" xmlns:v="urn:schemas-microsoft-com:vml" xmlns:pvml="urn:schemas-microsoft-com:office:powerpoint" xmlns:com="http://schemas.openxmlformats.org/drawingml/2006/compatibility" xmlns:p14="http://schemas.microsoft.com/office/powerpoint/2010/main" xmlns:p15="http://schemas.microsoft.com/office/powerpoint/2012/main" xmlns:ahyp="http://schemas.microsoft.com/office/drawing/2018/hyperlinkcolor">
   <p:cSld>
@@ -26665,7 +26667,7 @@
                 <a:cs typeface="Arial"/>
                 <a:sym typeface="Arial"/>
               </a:rPr>
-              <a:t>Зах зээлийн судалгаанд үндэслэн шийдвэр гаргана. Дараагийн алхмуудаа тодорхой төлөвлөнө. Өсөлтийг тогтмол хэмжиж, сайжруулна. </a:t>
+              <a:t>Тоо баримт, жишээ ашиглавал илүү үр дүнтэй. Бид хэрэглэгчдэдээ үнэ цэн бүтээхийг зорьдог. Төслийн явц, үр дүнг энд харуулна. </a:t>
             </a:r>
             <a:endParaRPr/>
           </a:p>
@@ -26718,7 +26720,7 @@
                 <a:cs typeface="Arial"/>
                 <a:sym typeface="Arial"/>
               </a:rPr>
-              <a:t>Энэ хэсэгт өөрийн текстээ оруулна уу. Гол үзүүлэлтүүдээ товч дурдана. Хэрэглэгчийн хэрэгцээг нарийн судална. </a:t>
+              <a:t>Багаараа хамтран шинэ шийдэл хэрэгжүүлнэ. Зах зээлийн судалгаанд үндэслэн шийдвэр гаргана. Дараагийн алхмуудаа тодорхой төлөвлөнө. </a:t>
             </a:r>
             <a:endParaRPr/>
           </a:p>
